--- a/output/20260714_ベンチマークホテルマッピング_札幌市.pptx
+++ b/output/20260714_ベンチマークホテルマッピング_札幌市.pptx
@@ -3200,7 +3200,7 @@
                 <a:latin typeface="Meiryo"/>
                 <a:ea typeface="Meiryo"/>
               </a:rPr>
-              <a:t>対象マーケットにおけるベンチマークホテルの分布と概要（27施設）</a:t>
+              <a:t>対象マーケットにおけるベンチマークホテルの分布と概要（26施設）</a:t>
             </a:r>
           </a:p>
         </p:txBody>
@@ -3376,62 +3376,6 @@
         </p:nvSpPr>
         <p:spPr>
           <a:xfrm>
-            <a:off x="2626548" y="4224788"/>
-            <a:ext cx="274320" cy="274320"/>
-          </a:xfrm>
-          <a:prstGeom prst="ellipse">
-            <a:avLst/>
-          </a:prstGeom>
-          <a:solidFill>
-            <a:srgbClr val="2563EB"/>
-          </a:solidFill>
-          <a:ln w="15875">
-            <a:solidFill>
-              <a:srgbClr val="FFFFFF"/>
-            </a:solidFill>
-          </a:ln>
-          <a:effectLst/>
-        </p:spPr>
-        <p:style>
-          <a:lnRef idx="1">
-            <a:schemeClr val="accent1"/>
-          </a:lnRef>
-          <a:fillRef idx="3">
-            <a:schemeClr val="accent1"/>
-          </a:fillRef>
-          <a:effectRef idx="2">
-            <a:schemeClr val="accent1"/>
-          </a:effectRef>
-          <a:fontRef idx="minor">
-            <a:schemeClr val="lt1"/>
-          </a:fontRef>
-        </p:style>
-        <p:txBody>
-          <a:bodyPr rtlCol="0" anchor="ctr" lIns="0" rIns="0" tIns="0" bIns="0" wrap="none"/>
-          <a:lstStyle/>
-          <a:p>
-            <a:pPr algn="ctr"/>
-            <a:r>
-              <a:rPr sz="1000" b="1">
-                <a:solidFill>
-                  <a:srgbClr val="FFFFFF"/>
-                </a:solidFill>
-                <a:latin typeface="Meiryo"/>
-                <a:ea typeface="Meiryo"/>
-              </a:rPr>
-              <a:t>1</a:t>
-            </a:r>
-          </a:p>
-        </p:txBody>
-      </p:sp>
-      <p:sp>
-        <p:nvSpPr>
-          <p:cNvPr id="6" name="Oval 5"/>
-          <p:cNvSpPr/>
-          <p:nvPr/>
-        </p:nvSpPr>
-        <p:spPr>
-          <a:xfrm>
             <a:off x="4567905" y="2495437"/>
             <a:ext cx="274320" cy="274320"/>
           </a:xfrm>
@@ -3475,14 +3419,14 @@
                 <a:latin typeface="Meiryo"/>
                 <a:ea typeface="Meiryo"/>
               </a:rPr>
-              <a:t>2</a:t>
+              <a:t>1</a:t>
             </a:r>
           </a:p>
         </p:txBody>
       </p:sp>
       <p:sp>
         <p:nvSpPr>
-          <p:cNvPr id="7" name="Oval 6"/>
+          <p:cNvPr id="6" name="Oval 5"/>
           <p:cNvSpPr/>
           <p:nvPr/>
         </p:nvSpPr>
@@ -3531,14 +3475,14 @@
                 <a:latin typeface="Meiryo"/>
                 <a:ea typeface="Meiryo"/>
               </a:rPr>
-              <a:t>3</a:t>
+              <a:t>2</a:t>
             </a:r>
           </a:p>
         </p:txBody>
       </p:sp>
       <p:sp>
         <p:nvSpPr>
-          <p:cNvPr id="8" name="Oval 7"/>
+          <p:cNvPr id="7" name="Oval 6"/>
           <p:cNvSpPr/>
           <p:nvPr/>
         </p:nvSpPr>
@@ -3587,14 +3531,14 @@
                 <a:latin typeface="Meiryo"/>
                 <a:ea typeface="Meiryo"/>
               </a:rPr>
-              <a:t>4</a:t>
+              <a:t>3</a:t>
             </a:r>
           </a:p>
         </p:txBody>
       </p:sp>
       <p:sp>
         <p:nvSpPr>
-          <p:cNvPr id="9" name="Oval 8"/>
+          <p:cNvPr id="8" name="Oval 7"/>
           <p:cNvSpPr/>
           <p:nvPr/>
         </p:nvSpPr>
@@ -3643,14 +3587,14 @@
                 <a:latin typeface="Meiryo"/>
                 <a:ea typeface="Meiryo"/>
               </a:rPr>
-              <a:t>5</a:t>
+              <a:t>4</a:t>
             </a:r>
           </a:p>
         </p:txBody>
       </p:sp>
       <p:sp>
         <p:nvSpPr>
-          <p:cNvPr id="10" name="Oval 9"/>
+          <p:cNvPr id="9" name="Oval 8"/>
           <p:cNvSpPr/>
           <p:nvPr/>
         </p:nvSpPr>
@@ -3699,14 +3643,14 @@
                 <a:latin typeface="Meiryo"/>
                 <a:ea typeface="Meiryo"/>
               </a:rPr>
-              <a:t>6</a:t>
+              <a:t>5</a:t>
             </a:r>
           </a:p>
         </p:txBody>
       </p:sp>
       <p:sp>
         <p:nvSpPr>
-          <p:cNvPr id="11" name="Oval 10"/>
+          <p:cNvPr id="10" name="Oval 9"/>
           <p:cNvSpPr/>
           <p:nvPr/>
         </p:nvSpPr>
@@ -3755,14 +3699,14 @@
                 <a:latin typeface="Meiryo"/>
                 <a:ea typeface="Meiryo"/>
               </a:rPr>
-              <a:t>7</a:t>
+              <a:t>6</a:t>
             </a:r>
           </a:p>
         </p:txBody>
       </p:sp>
       <p:sp>
         <p:nvSpPr>
-          <p:cNvPr id="12" name="Oval 11"/>
+          <p:cNvPr id="11" name="Oval 10"/>
           <p:cNvSpPr/>
           <p:nvPr/>
         </p:nvSpPr>
@@ -3811,14 +3755,14 @@
                 <a:latin typeface="Meiryo"/>
                 <a:ea typeface="Meiryo"/>
               </a:rPr>
-              <a:t>8</a:t>
+              <a:t>7</a:t>
             </a:r>
           </a:p>
         </p:txBody>
       </p:sp>
       <p:sp>
         <p:nvSpPr>
-          <p:cNvPr id="13" name="Oval 12"/>
+          <p:cNvPr id="12" name="Oval 11"/>
           <p:cNvSpPr/>
           <p:nvPr/>
         </p:nvSpPr>
@@ -3867,14 +3811,14 @@
                 <a:latin typeface="Meiryo"/>
                 <a:ea typeface="Meiryo"/>
               </a:rPr>
-              <a:t>9</a:t>
+              <a:t>8</a:t>
             </a:r>
           </a:p>
         </p:txBody>
       </p:sp>
       <p:sp>
         <p:nvSpPr>
-          <p:cNvPr id="14" name="Oval 13"/>
+          <p:cNvPr id="13" name="Oval 12"/>
           <p:cNvSpPr/>
           <p:nvPr/>
         </p:nvSpPr>
@@ -3923,14 +3867,14 @@
                 <a:latin typeface="Meiryo"/>
                 <a:ea typeface="Meiryo"/>
               </a:rPr>
-              <a:t>10</a:t>
+              <a:t>9</a:t>
             </a:r>
           </a:p>
         </p:txBody>
       </p:sp>
       <p:sp>
         <p:nvSpPr>
-          <p:cNvPr id="15" name="Oval 14"/>
+          <p:cNvPr id="14" name="Oval 13"/>
           <p:cNvSpPr/>
           <p:nvPr/>
         </p:nvSpPr>
@@ -3979,14 +3923,14 @@
                 <a:latin typeface="Meiryo"/>
                 <a:ea typeface="Meiryo"/>
               </a:rPr>
-              <a:t>11</a:t>
+              <a:t>10</a:t>
             </a:r>
           </a:p>
         </p:txBody>
       </p:sp>
       <p:sp>
         <p:nvSpPr>
-          <p:cNvPr id="16" name="Oval 15"/>
+          <p:cNvPr id="15" name="Oval 14"/>
           <p:cNvSpPr/>
           <p:nvPr/>
         </p:nvSpPr>
@@ -4035,14 +3979,14 @@
                 <a:latin typeface="Meiryo"/>
                 <a:ea typeface="Meiryo"/>
               </a:rPr>
-              <a:t>12</a:t>
+              <a:t>11</a:t>
             </a:r>
           </a:p>
         </p:txBody>
       </p:sp>
       <p:sp>
         <p:nvSpPr>
-          <p:cNvPr id="17" name="Oval 16"/>
+          <p:cNvPr id="16" name="Oval 15"/>
           <p:cNvSpPr/>
           <p:nvPr/>
         </p:nvSpPr>
@@ -4091,14 +4035,14 @@
                 <a:latin typeface="Meiryo"/>
                 <a:ea typeface="Meiryo"/>
               </a:rPr>
-              <a:t>13</a:t>
+              <a:t>12</a:t>
             </a:r>
           </a:p>
         </p:txBody>
       </p:sp>
       <p:sp>
         <p:nvSpPr>
-          <p:cNvPr id="18" name="Oval 17"/>
+          <p:cNvPr id="17" name="Oval 16"/>
           <p:cNvSpPr/>
           <p:nvPr/>
         </p:nvSpPr>
@@ -4147,14 +4091,14 @@
                 <a:latin typeface="Meiryo"/>
                 <a:ea typeface="Meiryo"/>
               </a:rPr>
-              <a:t>14</a:t>
+              <a:t>13</a:t>
             </a:r>
           </a:p>
         </p:txBody>
       </p:sp>
       <p:sp>
         <p:nvSpPr>
-          <p:cNvPr id="19" name="Oval 18"/>
+          <p:cNvPr id="18" name="Oval 17"/>
           <p:cNvSpPr/>
           <p:nvPr/>
         </p:nvSpPr>
@@ -4203,14 +4147,14 @@
                 <a:latin typeface="Meiryo"/>
                 <a:ea typeface="Meiryo"/>
               </a:rPr>
-              <a:t>15</a:t>
+              <a:t>14</a:t>
             </a:r>
           </a:p>
         </p:txBody>
       </p:sp>
       <p:sp>
         <p:nvSpPr>
-          <p:cNvPr id="20" name="Oval 19"/>
+          <p:cNvPr id="19" name="Oval 18"/>
           <p:cNvSpPr/>
           <p:nvPr/>
         </p:nvSpPr>
@@ -4259,14 +4203,14 @@
                 <a:latin typeface="Meiryo"/>
                 <a:ea typeface="Meiryo"/>
               </a:rPr>
-              <a:t>16</a:t>
+              <a:t>15</a:t>
             </a:r>
           </a:p>
         </p:txBody>
       </p:sp>
       <p:sp>
         <p:nvSpPr>
-          <p:cNvPr id="21" name="Oval 20"/>
+          <p:cNvPr id="20" name="Oval 19"/>
           <p:cNvSpPr/>
           <p:nvPr/>
         </p:nvSpPr>
@@ -4315,14 +4259,14 @@
                 <a:latin typeface="Meiryo"/>
                 <a:ea typeface="Meiryo"/>
               </a:rPr>
-              <a:t>17</a:t>
+              <a:t>16</a:t>
             </a:r>
           </a:p>
         </p:txBody>
       </p:sp>
       <p:sp>
         <p:nvSpPr>
-          <p:cNvPr id="22" name="Oval 21"/>
+          <p:cNvPr id="21" name="Oval 20"/>
           <p:cNvSpPr/>
           <p:nvPr/>
         </p:nvSpPr>
@@ -4371,14 +4315,14 @@
                 <a:latin typeface="Meiryo"/>
                 <a:ea typeface="Meiryo"/>
               </a:rPr>
-              <a:t>18</a:t>
+              <a:t>17</a:t>
             </a:r>
           </a:p>
         </p:txBody>
       </p:sp>
       <p:sp>
         <p:nvSpPr>
-          <p:cNvPr id="23" name="Oval 22"/>
+          <p:cNvPr id="22" name="Oval 21"/>
           <p:cNvSpPr/>
           <p:nvPr/>
         </p:nvSpPr>
@@ -4427,14 +4371,14 @@
                 <a:latin typeface="Meiryo"/>
                 <a:ea typeface="Meiryo"/>
               </a:rPr>
-              <a:t>19</a:t>
+              <a:t>18</a:t>
             </a:r>
           </a:p>
         </p:txBody>
       </p:sp>
       <p:sp>
         <p:nvSpPr>
-          <p:cNvPr id="24" name="Oval 23"/>
+          <p:cNvPr id="23" name="Oval 22"/>
           <p:cNvSpPr/>
           <p:nvPr/>
         </p:nvSpPr>
@@ -4483,14 +4427,14 @@
                 <a:latin typeface="Meiryo"/>
                 <a:ea typeface="Meiryo"/>
               </a:rPr>
-              <a:t>20</a:t>
+              <a:t>19</a:t>
             </a:r>
           </a:p>
         </p:txBody>
       </p:sp>
       <p:sp>
         <p:nvSpPr>
-          <p:cNvPr id="25" name="Oval 24"/>
+          <p:cNvPr id="24" name="Oval 23"/>
           <p:cNvSpPr/>
           <p:nvPr/>
         </p:nvSpPr>
@@ -4539,14 +4483,14 @@
                 <a:latin typeface="Meiryo"/>
                 <a:ea typeface="Meiryo"/>
               </a:rPr>
-              <a:t>21</a:t>
+              <a:t>20</a:t>
             </a:r>
           </a:p>
         </p:txBody>
       </p:sp>
       <p:sp>
         <p:nvSpPr>
-          <p:cNvPr id="26" name="Oval 25"/>
+          <p:cNvPr id="25" name="Oval 24"/>
           <p:cNvSpPr/>
           <p:nvPr/>
         </p:nvSpPr>
@@ -4595,6 +4539,62 @@
                 <a:latin typeface="Meiryo"/>
                 <a:ea typeface="Meiryo"/>
               </a:rPr>
+              <a:t>21</a:t>
+            </a:r>
+          </a:p>
+        </p:txBody>
+      </p:sp>
+      <p:sp>
+        <p:nvSpPr>
+          <p:cNvPr id="26" name="Oval 25"/>
+          <p:cNvSpPr/>
+          <p:nvPr/>
+        </p:nvSpPr>
+        <p:spPr>
+          <a:xfrm>
+            <a:off x="4076441" y="2587329"/>
+            <a:ext cx="274320" cy="274320"/>
+          </a:xfrm>
+          <a:prstGeom prst="ellipse">
+            <a:avLst/>
+          </a:prstGeom>
+          <a:solidFill>
+            <a:srgbClr val="2563EB"/>
+          </a:solidFill>
+          <a:ln w="15875">
+            <a:solidFill>
+              <a:srgbClr val="FFFFFF"/>
+            </a:solidFill>
+          </a:ln>
+          <a:effectLst/>
+        </p:spPr>
+        <p:style>
+          <a:lnRef idx="1">
+            <a:schemeClr val="accent1"/>
+          </a:lnRef>
+          <a:fillRef idx="3">
+            <a:schemeClr val="accent1"/>
+          </a:fillRef>
+          <a:effectRef idx="2">
+            <a:schemeClr val="accent1"/>
+          </a:effectRef>
+          <a:fontRef idx="minor">
+            <a:schemeClr val="lt1"/>
+          </a:fontRef>
+        </p:style>
+        <p:txBody>
+          <a:bodyPr rtlCol="0" anchor="ctr" lIns="0" rIns="0" tIns="0" bIns="0" wrap="none"/>
+          <a:lstStyle/>
+          <a:p>
+            <a:pPr algn="ctr"/>
+            <a:r>
+              <a:rPr sz="1000" b="1">
+                <a:solidFill>
+                  <a:srgbClr val="FFFFFF"/>
+                </a:solidFill>
+                <a:latin typeface="Meiryo"/>
+                <a:ea typeface="Meiryo"/>
+              </a:rPr>
               <a:t>22</a:t>
             </a:r>
           </a:p>
@@ -4608,7 +4608,7 @@
         </p:nvSpPr>
         <p:spPr>
           <a:xfrm>
-            <a:off x="4076441" y="2587329"/>
+            <a:off x="3743881" y="3100508"/>
             <a:ext cx="274320" cy="274320"/>
           </a:xfrm>
           <a:prstGeom prst="ellipse">
@@ -4720,62 +4720,6 @@
         </p:nvSpPr>
         <p:spPr>
           <a:xfrm>
-            <a:off x="3743881" y="3100508"/>
-            <a:ext cx="274320" cy="274320"/>
-          </a:xfrm>
-          <a:prstGeom prst="ellipse">
-            <a:avLst/>
-          </a:prstGeom>
-          <a:solidFill>
-            <a:srgbClr val="2563EB"/>
-          </a:solidFill>
-          <a:ln w="15875">
-            <a:solidFill>
-              <a:srgbClr val="FFFFFF"/>
-            </a:solidFill>
-          </a:ln>
-          <a:effectLst/>
-        </p:spPr>
-        <p:style>
-          <a:lnRef idx="1">
-            <a:schemeClr val="accent1"/>
-          </a:lnRef>
-          <a:fillRef idx="3">
-            <a:schemeClr val="accent1"/>
-          </a:fillRef>
-          <a:effectRef idx="2">
-            <a:schemeClr val="accent1"/>
-          </a:effectRef>
-          <a:fontRef idx="minor">
-            <a:schemeClr val="lt1"/>
-          </a:fontRef>
-        </p:style>
-        <p:txBody>
-          <a:bodyPr rtlCol="0" anchor="ctr" lIns="0" rIns="0" tIns="0" bIns="0" wrap="none"/>
-          <a:lstStyle/>
-          <a:p>
-            <a:pPr algn="ctr"/>
-            <a:r>
-              <a:rPr sz="1000" b="1">
-                <a:solidFill>
-                  <a:srgbClr val="FFFFFF"/>
-                </a:solidFill>
-                <a:latin typeface="Meiryo"/>
-                <a:ea typeface="Meiryo"/>
-              </a:rPr>
-              <a:t>25</a:t>
-            </a:r>
-          </a:p>
-        </p:txBody>
-      </p:sp>
-      <p:sp>
-        <p:nvSpPr>
-          <p:cNvPr id="30" name="Oval 29"/>
-          <p:cNvSpPr/>
-          <p:nvPr/>
-        </p:nvSpPr>
-        <p:spPr>
-          <a:xfrm>
             <a:off x="4109467" y="3891906"/>
             <a:ext cx="274320" cy="274320"/>
           </a:xfrm>
@@ -4819,14 +4763,14 @@
                 <a:latin typeface="Meiryo"/>
                 <a:ea typeface="Meiryo"/>
               </a:rPr>
-              <a:t>26</a:t>
+              <a:t>25</a:t>
             </a:r>
           </a:p>
         </p:txBody>
       </p:sp>
       <p:sp>
         <p:nvSpPr>
-          <p:cNvPr id="31" name="Oval 30"/>
+          <p:cNvPr id="30" name="Oval 29"/>
           <p:cNvSpPr/>
           <p:nvPr/>
         </p:nvSpPr>
@@ -4875,14 +4819,14 @@
                 <a:latin typeface="Meiryo"/>
                 <a:ea typeface="Meiryo"/>
               </a:rPr>
-              <a:t>27</a:t>
+              <a:t>26</a:t>
             </a:r>
           </a:p>
         </p:txBody>
       </p:sp>
       <p:graphicFrame>
         <p:nvGraphicFramePr>
-          <p:cNvPr id="32" name="Table 31"/>
+          <p:cNvPr id="31" name="Table 30"/>
           <p:cNvGraphicFramePr>
             <a:graphicFrameLocks noGrp="1"/>
           </p:cNvGraphicFramePr>
@@ -4890,7 +4834,7 @@
         </p:nvGraphicFramePr>
         <p:xfrm>
           <a:off x="7770338" y="914400"/>
-          <a:ext cx="4238476" cy="7168896"/>
+          <a:ext cx="4238476" cy="6912864"/>
         </p:xfrm>
         <a:graphic>
           <a:graphicData uri="http://schemas.openxmlformats.org/drawingml/2006/table">
@@ -5041,7 +4985,7 @@
                           <a:latin typeface="Meiryo"/>
                           <a:ea typeface="Meiryo"/>
                         </a:rPr>
-                        <a:t>札幌プリンスホテル</a:t>
+                        <a:t>ANAクラウンプラザホテル札幌</a:t>
                       </a:r>
                     </a:p>
                   </a:txBody>
@@ -5065,7 +5009,7 @@
                           <a:latin typeface="Meiryo"/>
                           <a:ea typeface="Meiryo"/>
                         </a:rPr>
-                        <a:t>587室</a:t>
+                        <a:t>412室</a:t>
                       </a:r>
                     </a:p>
                   </a:txBody>
@@ -5089,7 +5033,7 @@
                           <a:latin typeface="Meiryo"/>
                           <a:ea typeface="Meiryo"/>
                         </a:rPr>
-                        <a:t>1972年</a:t>
+                        <a:t>1974年</a:t>
                       </a:r>
                     </a:p>
                   </a:txBody>
@@ -5139,7 +5083,7 @@
                           <a:latin typeface="Meiryo"/>
                           <a:ea typeface="Meiryo"/>
                         </a:rPr>
-                        <a:t>ANAクラウンプラザホテル札幌</a:t>
+                        <a:t>京王プラザホテル札幌</a:t>
                       </a:r>
                     </a:p>
                   </a:txBody>
@@ -5163,7 +5107,7 @@
                           <a:latin typeface="Meiryo"/>
                           <a:ea typeface="Meiryo"/>
                         </a:rPr>
-                        <a:t>412室</a:t>
+                        <a:t>483室</a:t>
                       </a:r>
                     </a:p>
                   </a:txBody>
@@ -5187,7 +5131,7 @@
                           <a:latin typeface="Meiryo"/>
                           <a:ea typeface="Meiryo"/>
                         </a:rPr>
-                        <a:t>1974年</a:t>
+                        <a:t>1982年</a:t>
                       </a:r>
                     </a:p>
                   </a:txBody>
@@ -5237,7 +5181,7 @@
                           <a:latin typeface="Meiryo"/>
                           <a:ea typeface="Meiryo"/>
                         </a:rPr>
-                        <a:t>京王プラザホテル札幌</a:t>
+                        <a:t>グランドメルキュール札幌大通公園</a:t>
                       </a:r>
                     </a:p>
                   </a:txBody>
@@ -5261,7 +5205,7 @@
                           <a:latin typeface="Meiryo"/>
                           <a:ea typeface="Meiryo"/>
                         </a:rPr>
-                        <a:t>483室</a:t>
+                        <a:t>294室</a:t>
                       </a:r>
                     </a:p>
                   </a:txBody>
@@ -5285,7 +5229,7 @@
                           <a:latin typeface="Meiryo"/>
                           <a:ea typeface="Meiryo"/>
                         </a:rPr>
-                        <a:t>1982年</a:t>
+                        <a:t>1992年</a:t>
                       </a:r>
                     </a:p>
                   </a:txBody>
@@ -5335,7 +5279,7 @@
                           <a:latin typeface="Meiryo"/>
                           <a:ea typeface="Meiryo"/>
                         </a:rPr>
-                        <a:t>グランドメルキュール札幌大通公園</a:t>
+                        <a:t>ホテルモントレ札幌</a:t>
                       </a:r>
                     </a:p>
                   </a:txBody>
@@ -5359,7 +5303,7 @@
                           <a:latin typeface="Meiryo"/>
                           <a:ea typeface="Meiryo"/>
                         </a:rPr>
-                        <a:t>294室</a:t>
+                        <a:t>250室</a:t>
                       </a:r>
                     </a:p>
                   </a:txBody>
@@ -5383,7 +5327,7 @@
                           <a:latin typeface="Meiryo"/>
                           <a:ea typeface="Meiryo"/>
                         </a:rPr>
-                        <a:t>1992年</a:t>
+                        <a:t>1994年</a:t>
                       </a:r>
                     </a:p>
                   </a:txBody>
@@ -5433,7 +5377,7 @@
                           <a:latin typeface="Meiryo"/>
                           <a:ea typeface="Meiryo"/>
                         </a:rPr>
-                        <a:t>ホテルモントレ札幌</a:t>
+                        <a:t>フェアフィールド・バイ・マリオット札幌</a:t>
                       </a:r>
                     </a:p>
                   </a:txBody>
@@ -5457,7 +5401,7 @@
                           <a:latin typeface="Meiryo"/>
                           <a:ea typeface="Meiryo"/>
                         </a:rPr>
-                        <a:t>250室</a:t>
+                        <a:t>254室</a:t>
                       </a:r>
                     </a:p>
                   </a:txBody>
@@ -5481,7 +5425,7 @@
                           <a:latin typeface="Meiryo"/>
                           <a:ea typeface="Meiryo"/>
                         </a:rPr>
-                        <a:t>1994年</a:t>
+                        <a:t>1995年</a:t>
                       </a:r>
                     </a:p>
                   </a:txBody>
@@ -5531,7 +5475,7 @@
                           <a:latin typeface="Meiryo"/>
                           <a:ea typeface="Meiryo"/>
                         </a:rPr>
-                        <a:t>フェアフィールド・バイ・マリオット札幌</a:t>
+                        <a:t>JRタワーホテル日航札幌</a:t>
                       </a:r>
                     </a:p>
                   </a:txBody>
@@ -5555,7 +5499,7 @@
                           <a:latin typeface="Meiryo"/>
                           <a:ea typeface="Meiryo"/>
                         </a:rPr>
-                        <a:t>254室</a:t>
+                        <a:t>342室</a:t>
                       </a:r>
                     </a:p>
                   </a:txBody>
@@ -5579,7 +5523,7 @@
                           <a:latin typeface="Meiryo"/>
                           <a:ea typeface="Meiryo"/>
                         </a:rPr>
-                        <a:t>1995年</a:t>
+                        <a:t>2003年</a:t>
                       </a:r>
                     </a:p>
                   </a:txBody>
@@ -5629,7 +5573,7 @@
                           <a:latin typeface="Meiryo"/>
                           <a:ea typeface="Meiryo"/>
                         </a:rPr>
-                        <a:t>JRタワーホテル日航札幌</a:t>
+                        <a:t>ホテルグレイスリー札幌</a:t>
                       </a:r>
                     </a:p>
                   </a:txBody>
@@ -5653,7 +5597,7 @@
                           <a:latin typeface="Meiryo"/>
                           <a:ea typeface="Meiryo"/>
                         </a:rPr>
-                        <a:t>342室</a:t>
+                        <a:t>440室</a:t>
                       </a:r>
                     </a:p>
                   </a:txBody>
@@ -5677,7 +5621,7 @@
                           <a:latin typeface="Meiryo"/>
                           <a:ea typeface="Meiryo"/>
                         </a:rPr>
-                        <a:t>2003年</a:t>
+                        <a:t>2006年</a:t>
                       </a:r>
                     </a:p>
                   </a:txBody>
@@ -5727,7 +5671,7 @@
                           <a:latin typeface="Meiryo"/>
                           <a:ea typeface="Meiryo"/>
                         </a:rPr>
-                        <a:t>ホテルグレイスリー札幌</a:t>
+                        <a:t>クロスホテル札幌</a:t>
                       </a:r>
                     </a:p>
                   </a:txBody>
@@ -5751,7 +5695,7 @@
                           <a:latin typeface="Meiryo"/>
                           <a:ea typeface="Meiryo"/>
                         </a:rPr>
-                        <a:t>440室</a:t>
+                        <a:t>181室</a:t>
                       </a:r>
                     </a:p>
                   </a:txBody>
@@ -5775,7 +5719,7 @@
                           <a:latin typeface="Meiryo"/>
                           <a:ea typeface="Meiryo"/>
                         </a:rPr>
-                        <a:t>2006年</a:t>
+                        <a:t>2007年</a:t>
                       </a:r>
                     </a:p>
                   </a:txBody>
@@ -5825,7 +5769,7 @@
                           <a:latin typeface="Meiryo"/>
                           <a:ea typeface="Meiryo"/>
                         </a:rPr>
-                        <a:t>クロスホテル札幌</a:t>
+                        <a:t>メルキュールホテル札幌</a:t>
                       </a:r>
                     </a:p>
                   </a:txBody>
@@ -5849,7 +5793,7 @@
                           <a:latin typeface="Meiryo"/>
                           <a:ea typeface="Meiryo"/>
                         </a:rPr>
-                        <a:t>181室</a:t>
+                        <a:t>285室</a:t>
                       </a:r>
                     </a:p>
                   </a:txBody>
@@ -5873,7 +5817,7 @@
                           <a:latin typeface="Meiryo"/>
                           <a:ea typeface="Meiryo"/>
                         </a:rPr>
-                        <a:t>2007年</a:t>
+                        <a:t>2009年</a:t>
                       </a:r>
                     </a:p>
                   </a:txBody>
@@ -5923,7 +5867,7 @@
                           <a:latin typeface="Meiryo"/>
                           <a:ea typeface="Meiryo"/>
                         </a:rPr>
-                        <a:t>メルキュールホテル札幌</a:t>
+                        <a:t>三井ガーデンホテル札幌</a:t>
                       </a:r>
                     </a:p>
                   </a:txBody>
@@ -5947,7 +5891,7 @@
                           <a:latin typeface="Meiryo"/>
                           <a:ea typeface="Meiryo"/>
                         </a:rPr>
-                        <a:t>285室</a:t>
+                        <a:t>177室</a:t>
                       </a:r>
                     </a:p>
                   </a:txBody>
@@ -5971,7 +5915,7 @@
                           <a:latin typeface="Meiryo"/>
                           <a:ea typeface="Meiryo"/>
                         </a:rPr>
-                        <a:t>2009年</a:t>
+                        <a:t>2010年</a:t>
                       </a:r>
                     </a:p>
                   </a:txBody>
@@ -6021,7 +5965,7 @@
                           <a:latin typeface="Meiryo"/>
                           <a:ea typeface="Meiryo"/>
                         </a:rPr>
-                        <a:t>三井ガーデンホテル札幌</a:t>
+                        <a:t>ラ・ジェント・ステイ札幌大通</a:t>
                       </a:r>
                     </a:p>
                   </a:txBody>
@@ -6045,7 +5989,7 @@
                           <a:latin typeface="Meiryo"/>
                           <a:ea typeface="Meiryo"/>
                         </a:rPr>
-                        <a:t>177室</a:t>
+                        <a:t>219室</a:t>
                       </a:r>
                     </a:p>
                   </a:txBody>
@@ -6069,7 +6013,7 @@
                           <a:latin typeface="Meiryo"/>
                           <a:ea typeface="Meiryo"/>
                         </a:rPr>
-                        <a:t>2010年</a:t>
+                        <a:t>2016年</a:t>
                       </a:r>
                     </a:p>
                   </a:txBody>
@@ -6119,7 +6063,7 @@
                           <a:latin typeface="Meiryo"/>
                           <a:ea typeface="Meiryo"/>
                         </a:rPr>
-                        <a:t>ラ・ジェント・ステイ札幌大通</a:t>
+                        <a:t>京王プレリアホテル 札幌</a:t>
                       </a:r>
                     </a:p>
                   </a:txBody>
@@ -6143,7 +6087,7 @@
                           <a:latin typeface="Meiryo"/>
                           <a:ea typeface="Meiryo"/>
                         </a:rPr>
-                        <a:t>219室</a:t>
+                        <a:t>337室</a:t>
                       </a:r>
                     </a:p>
                   </a:txBody>
@@ -6167,7 +6111,7 @@
                           <a:latin typeface="Meiryo"/>
                           <a:ea typeface="Meiryo"/>
                         </a:rPr>
-                        <a:t>2016年</a:t>
+                        <a:t>2019年</a:t>
                       </a:r>
                     </a:p>
                   </a:txBody>
@@ -6217,7 +6161,7 @@
                           <a:latin typeface="Meiryo"/>
                           <a:ea typeface="Meiryo"/>
                         </a:rPr>
-                        <a:t>京王プレリアホテル 札幌</a:t>
+                        <a:t>三井ガーデンホテル札幌ウエスト</a:t>
                       </a:r>
                     </a:p>
                   </a:txBody>
@@ -6241,7 +6185,7 @@
                           <a:latin typeface="Meiryo"/>
                           <a:ea typeface="Meiryo"/>
                         </a:rPr>
-                        <a:t>337室</a:t>
+                        <a:t>169室</a:t>
                       </a:r>
                     </a:p>
                   </a:txBody>
@@ -6265,7 +6209,7 @@
                           <a:latin typeface="Meiryo"/>
                           <a:ea typeface="Meiryo"/>
                         </a:rPr>
-                        <a:t>2019年</a:t>
+                        <a:t>2020年</a:t>
                       </a:r>
                     </a:p>
                   </a:txBody>
@@ -6315,7 +6259,7 @@
                           <a:latin typeface="Meiryo"/>
                           <a:ea typeface="Meiryo"/>
                         </a:rPr>
-                        <a:t>三井ガーデンホテル札幌ウエスト</a:t>
+                        <a:t>THE KNOT SAPPORO</a:t>
                       </a:r>
                     </a:p>
                   </a:txBody>
@@ -6339,7 +6283,7 @@
                           <a:latin typeface="Meiryo"/>
                           <a:ea typeface="Meiryo"/>
                         </a:rPr>
-                        <a:t>169室</a:t>
+                        <a:t>140室</a:t>
                       </a:r>
                     </a:p>
                   </a:txBody>
@@ -6413,7 +6357,7 @@
                           <a:latin typeface="Meiryo"/>
                           <a:ea typeface="Meiryo"/>
                         </a:rPr>
-                        <a:t>THE KNOT SAPPORO</a:t>
+                        <a:t>すすきのグランベルホテル</a:t>
                       </a:r>
                     </a:p>
                   </a:txBody>
@@ -6437,7 +6381,7 @@
                           <a:latin typeface="Meiryo"/>
                           <a:ea typeface="Meiryo"/>
                         </a:rPr>
-                        <a:t>140室</a:t>
+                        <a:t>300室</a:t>
                       </a:r>
                     </a:p>
                   </a:txBody>
@@ -6461,7 +6405,7 @@
                           <a:latin typeface="Meiryo"/>
                           <a:ea typeface="Meiryo"/>
                         </a:rPr>
-                        <a:t>2020年</a:t>
+                        <a:t>2021年</a:t>
                       </a:r>
                     </a:p>
                   </a:txBody>
@@ -6511,7 +6455,7 @@
                           <a:latin typeface="Meiryo"/>
                           <a:ea typeface="Meiryo"/>
                         </a:rPr>
-                        <a:t>すすきのグランベルホテル</a:t>
+                        <a:t>ザ ロイヤルパーク キャンバス 札幌大通公園</a:t>
                       </a:r>
                     </a:p>
                   </a:txBody>
@@ -6535,7 +6479,7 @@
                           <a:latin typeface="Meiryo"/>
                           <a:ea typeface="Meiryo"/>
                         </a:rPr>
-                        <a:t>300室</a:t>
+                        <a:t>134室</a:t>
                       </a:r>
                     </a:p>
                   </a:txBody>
@@ -6609,7 +6553,7 @@
                           <a:latin typeface="Meiryo"/>
                           <a:ea typeface="Meiryo"/>
                         </a:rPr>
-                        <a:t>ザ ロイヤルパーク キャンバス 札幌大通公園</a:t>
+                        <a:t>OMO3札幌すすきの</a:t>
                       </a:r>
                     </a:p>
                   </a:txBody>
@@ -6633,7 +6577,7 @@
                           <a:latin typeface="Meiryo"/>
                           <a:ea typeface="Meiryo"/>
                         </a:rPr>
-                        <a:t>134室</a:t>
+                        <a:t>226室</a:t>
                       </a:r>
                     </a:p>
                   </a:txBody>
@@ -6657,7 +6601,7 @@
                           <a:latin typeface="Meiryo"/>
                           <a:ea typeface="Meiryo"/>
                         </a:rPr>
-                        <a:t>2021年</a:t>
+                        <a:t>2022年</a:t>
                       </a:r>
                     </a:p>
                   </a:txBody>
@@ -6707,7 +6651,7 @@
                           <a:latin typeface="Meiryo"/>
                           <a:ea typeface="Meiryo"/>
                         </a:rPr>
-                        <a:t>OMO3札幌すすきの</a:t>
+                        <a:t>ホテルエミオン札幌</a:t>
                       </a:r>
                     </a:p>
                   </a:txBody>
@@ -6731,7 +6675,7 @@
                           <a:latin typeface="Meiryo"/>
                           <a:ea typeface="Meiryo"/>
                         </a:rPr>
-                        <a:t>226室</a:t>
+                        <a:t>295室</a:t>
                       </a:r>
                     </a:p>
                   </a:txBody>
@@ -6755,7 +6699,7 @@
                           <a:latin typeface="Meiryo"/>
                           <a:ea typeface="Meiryo"/>
                         </a:rPr>
-                        <a:t>2022年</a:t>
+                        <a:t>2023年</a:t>
                       </a:r>
                     </a:p>
                   </a:txBody>
@@ -6805,7 +6749,7 @@
                           <a:latin typeface="Meiryo"/>
                           <a:ea typeface="Meiryo"/>
                         </a:rPr>
-                        <a:t>ホテルエミオン札幌</a:t>
+                        <a:t>SAPPORO STREAM HOTEL</a:t>
                       </a:r>
                     </a:p>
                   </a:txBody>
@@ -6829,7 +6773,7 @@
                           <a:latin typeface="Meiryo"/>
                           <a:ea typeface="Meiryo"/>
                         </a:rPr>
-                        <a:t>295室</a:t>
+                        <a:t>436室</a:t>
                       </a:r>
                     </a:p>
                   </a:txBody>
@@ -6853,7 +6797,7 @@
                           <a:latin typeface="Meiryo"/>
                           <a:ea typeface="Meiryo"/>
                         </a:rPr>
-                        <a:t>2023年</a:t>
+                        <a:t>2024年</a:t>
                       </a:r>
                     </a:p>
                   </a:txBody>
@@ -6903,7 +6847,7 @@
                           <a:latin typeface="Meiryo"/>
                           <a:ea typeface="Meiryo"/>
                         </a:rPr>
-                        <a:t>SAPPORO STREAM HOTEL</a:t>
+                        <a:t>コートヤード・バイ・マリオット札幌</a:t>
                       </a:r>
                     </a:p>
                   </a:txBody>
@@ -6927,7 +6871,7 @@
                           <a:latin typeface="Meiryo"/>
                           <a:ea typeface="Meiryo"/>
                         </a:rPr>
-                        <a:t>436室</a:t>
+                        <a:t>321室</a:t>
                       </a:r>
                     </a:p>
                   </a:txBody>
@@ -7001,7 +6945,7 @@
                           <a:latin typeface="Meiryo"/>
                           <a:ea typeface="Meiryo"/>
                         </a:rPr>
-                        <a:t>コートヤード・バイ・マリオット札幌</a:t>
+                        <a:t>FAV LUX 札幌すすきの</a:t>
                       </a:r>
                     </a:p>
                   </a:txBody>
@@ -7025,7 +6969,7 @@
                           <a:latin typeface="Meiryo"/>
                           <a:ea typeface="Meiryo"/>
                         </a:rPr>
-                        <a:t>321室</a:t>
+                        <a:t>84室</a:t>
                       </a:r>
                     </a:p>
                   </a:txBody>
@@ -7049,7 +6993,7 @@
                           <a:latin typeface="Meiryo"/>
                           <a:ea typeface="Meiryo"/>
                         </a:rPr>
-                        <a:t>2024年</a:t>
+                        <a:t>2025年</a:t>
                       </a:r>
                     </a:p>
                   </a:txBody>
@@ -7099,7 +7043,7 @@
                           <a:latin typeface="Meiryo"/>
                           <a:ea typeface="Meiryo"/>
                         </a:rPr>
-                        <a:t>FAV LUX 札幌すすきの</a:t>
+                        <a:t>ザ・ゲートホテル札幌 by HULIC</a:t>
                       </a:r>
                     </a:p>
                   </a:txBody>
@@ -7123,7 +7067,7 @@
                           <a:latin typeface="Meiryo"/>
                           <a:ea typeface="Meiryo"/>
                         </a:rPr>
-                        <a:t>84室</a:t>
+                        <a:t>172室</a:t>
                       </a:r>
                     </a:p>
                   </a:txBody>
@@ -7197,7 +7141,7 @@
                           <a:latin typeface="Meiryo"/>
                           <a:ea typeface="Meiryo"/>
                         </a:rPr>
-                        <a:t>ザ・ゲートホテル札幌 by HULIC</a:t>
+                        <a:t>ハイアット セントリック札幌</a:t>
                       </a:r>
                     </a:p>
                   </a:txBody>
@@ -7221,7 +7165,7 @@
                           <a:latin typeface="Meiryo"/>
                           <a:ea typeface="Meiryo"/>
                         </a:rPr>
-                        <a:t>172室</a:t>
+                        <a:t>216室</a:t>
                       </a:r>
                     </a:p>
                   </a:txBody>
@@ -7245,7 +7189,7 @@
                           <a:latin typeface="Meiryo"/>
                           <a:ea typeface="Meiryo"/>
                         </a:rPr>
-                        <a:t>2025年</a:t>
+                        <a:t>2026年</a:t>
                       </a:r>
                     </a:p>
                   </a:txBody>
@@ -7295,7 +7239,7 @@
                           <a:latin typeface="Meiryo"/>
                           <a:ea typeface="Meiryo"/>
                         </a:rPr>
-                        <a:t>ハイアット セントリック札幌</a:t>
+                        <a:t>ハイアットセントリック札幌</a:t>
                       </a:r>
                     </a:p>
                   </a:txBody>
@@ -7393,7 +7337,7 @@
                           <a:latin typeface="Meiryo"/>
                           <a:ea typeface="Meiryo"/>
                         </a:rPr>
-                        <a:t>ハイアットセントリック札幌</a:t>
+                        <a:t>TRUNK HOTEL SAPPORO</a:t>
                       </a:r>
                     </a:p>
                   </a:txBody>
@@ -7417,7 +7361,7 @@
                           <a:latin typeface="Meiryo"/>
                           <a:ea typeface="Meiryo"/>
                         </a:rPr>
-                        <a:t>216室</a:t>
+                        <a:t>262室</a:t>
                       </a:r>
                     </a:p>
                   </a:txBody>
@@ -7441,7 +7385,7 @@
                           <a:latin typeface="Meiryo"/>
                           <a:ea typeface="Meiryo"/>
                         </a:rPr>
-                        <a:t>2026年</a:t>
+                        <a:t>2027年</a:t>
                       </a:r>
                     </a:p>
                   </a:txBody>
@@ -7491,7 +7435,7 @@
                           <a:latin typeface="Meiryo"/>
                           <a:ea typeface="Meiryo"/>
                         </a:rPr>
-                        <a:t>TRUNK HOTEL SAPPORO</a:t>
+                        <a:t>パーク ハイアット 札幌</a:t>
                       </a:r>
                     </a:p>
                   </a:txBody>
@@ -7515,7 +7459,7 @@
                           <a:latin typeface="Meiryo"/>
                           <a:ea typeface="Meiryo"/>
                         </a:rPr>
-                        <a:t>262室</a:t>
+                        <a:t>157室</a:t>
                       </a:r>
                     </a:p>
                   </a:txBody>
@@ -7539,111 +7483,13 @@
                           <a:latin typeface="Meiryo"/>
                           <a:ea typeface="Meiryo"/>
                         </a:rPr>
-                        <a:t>2027年</a:t>
+                        <a:t>2029年</a:t>
                       </a:r>
                     </a:p>
                   </a:txBody>
                   <a:tcPr marL="36576" marR="36576" marT="9144" marB="9144" anchor="ctr">
                     <a:solidFill>
                       <a:srgbClr val="F3F4F6"/>
-                    </a:solidFill>
-                  </a:tcPr>
-                </a:tc>
-              </a:tr>
-              <a:tr h="256032">
-                <a:tc>
-                  <a:txBody>
-                    <a:bodyPr/>
-                    <a:lstStyle/>
-                    <a:p>
-                      <a:pPr algn="ctr"/>
-                      <a:r>
-                        <a:rPr sz="850" b="1">
-                          <a:solidFill>
-                            <a:srgbClr val="FFFFFF"/>
-                          </a:solidFill>
-                          <a:latin typeface="Meiryo"/>
-                          <a:ea typeface="Meiryo"/>
-                        </a:rPr>
-                        <a:t>27</a:t>
-                      </a:r>
-                    </a:p>
-                  </a:txBody>
-                  <a:tcPr marL="36576" marR="36576" marT="9144" marB="9144" anchor="ctr">
-                    <a:solidFill>
-                      <a:srgbClr val="2563EB"/>
-                    </a:solidFill>
-                  </a:tcPr>
-                </a:tc>
-                <a:tc>
-                  <a:txBody>
-                    <a:bodyPr/>
-                    <a:lstStyle/>
-                    <a:p>
-                      <a:pPr algn="l"/>
-                      <a:r>
-                        <a:rPr sz="850" b="0">
-                          <a:solidFill>
-                            <a:srgbClr val="1F2937"/>
-                          </a:solidFill>
-                          <a:latin typeface="Meiryo"/>
-                          <a:ea typeface="Meiryo"/>
-                        </a:rPr>
-                        <a:t>パーク ハイアット 札幌</a:t>
-                      </a:r>
-                    </a:p>
-                  </a:txBody>
-                  <a:tcPr marL="36576" marR="36576" marT="9144" marB="9144" anchor="ctr">
-                    <a:solidFill>
-                      <a:srgbClr val="FFFFFF"/>
-                    </a:solidFill>
-                  </a:tcPr>
-                </a:tc>
-                <a:tc>
-                  <a:txBody>
-                    <a:bodyPr/>
-                    <a:lstStyle/>
-                    <a:p>
-                      <a:pPr algn="ctr"/>
-                      <a:r>
-                        <a:rPr sz="850" b="0">
-                          <a:solidFill>
-                            <a:srgbClr val="1F2937"/>
-                          </a:solidFill>
-                          <a:latin typeface="Meiryo"/>
-                          <a:ea typeface="Meiryo"/>
-                        </a:rPr>
-                        <a:t>157室</a:t>
-                      </a:r>
-                    </a:p>
-                  </a:txBody>
-                  <a:tcPr marL="36576" marR="36576" marT="9144" marB="9144" anchor="ctr">
-                    <a:solidFill>
-                      <a:srgbClr val="FFFFFF"/>
-                    </a:solidFill>
-                  </a:tcPr>
-                </a:tc>
-                <a:tc>
-                  <a:txBody>
-                    <a:bodyPr/>
-                    <a:lstStyle/>
-                    <a:p>
-                      <a:pPr algn="ctr"/>
-                      <a:r>
-                        <a:rPr sz="850" b="0">
-                          <a:solidFill>
-                            <a:srgbClr val="1F2937"/>
-                          </a:solidFill>
-                          <a:latin typeface="Meiryo"/>
-                          <a:ea typeface="Meiryo"/>
-                        </a:rPr>
-                        <a:t>2029年</a:t>
-                      </a:r>
-                    </a:p>
-                  </a:txBody>
-                  <a:tcPr marL="36576" marR="36576" marT="9144" marB="9144" anchor="ctr">
-                    <a:solidFill>
-                      <a:srgbClr val="FFFFFF"/>
                     </a:solidFill>
                   </a:tcPr>
                 </a:tc>
@@ -7716,7 +7562,7 @@
         </p:nvGraphicFramePr>
         <p:xfrm>
           <a:off x="228600" y="868680"/>
-          <a:ext cx="11704320" cy="8193024"/>
+          <a:ext cx="11704320" cy="7900416"/>
         </p:xfrm>
         <a:graphic>
           <a:graphicData uri="http://schemas.openxmlformats.org/drawingml/2006/table">
@@ -7942,7 +7788,7 @@
                           <a:latin typeface="Meiryo"/>
                           <a:ea typeface="Meiryo"/>
                         </a:rPr>
-                        <a:t>札幌プリンスホテル</a:t>
+                        <a:t>ANAクラウンプラザホテル札幌</a:t>
                       </a:r>
                     </a:p>
                   </a:txBody>
@@ -7990,31 +7836,31 @@
                           <a:latin typeface="Meiryo"/>
                           <a:ea typeface="Meiryo"/>
                         </a:rPr>
-                        <a:t>587</a:t>
-                      </a:r>
-                    </a:p>
-                  </a:txBody>
-                  <a:tcPr anchor="ctr">
-                    <a:solidFill>
-                      <a:srgbClr val="FFFFFF"/>
-                    </a:solidFill>
-                  </a:tcPr>
-                </a:tc>
-                <a:tc>
-                  <a:txBody>
-                    <a:bodyPr/>
-                    <a:lstStyle/>
-                    <a:p>
-                      <a:pPr algn="ctr"/>
-                      <a:r>
-                        <a:rPr sz="900" b="0">
-                          <a:solidFill>
-                            <a:srgbClr val="1F2937"/>
-                          </a:solidFill>
-                          <a:latin typeface="Meiryo"/>
-                          <a:ea typeface="Meiryo"/>
-                        </a:rPr>
-                        <a:t>1972年</a:t>
+                        <a:t>412</a:t>
+                      </a:r>
+                    </a:p>
+                  </a:txBody>
+                  <a:tcPr anchor="ctr">
+                    <a:solidFill>
+                      <a:srgbClr val="FFFFFF"/>
+                    </a:solidFill>
+                  </a:tcPr>
+                </a:tc>
+                <a:tc>
+                  <a:txBody>
+                    <a:bodyPr/>
+                    <a:lstStyle/>
+                    <a:p>
+                      <a:pPr algn="ctr"/>
+                      <a:r>
+                        <a:rPr sz="900" b="0">
+                          <a:solidFill>
+                            <a:srgbClr val="1F2937"/>
+                          </a:solidFill>
+                          <a:latin typeface="Meiryo"/>
+                          <a:ea typeface="Meiryo"/>
+                        </a:rPr>
+                        <a:t>1974年</a:t>
                       </a:r>
                     </a:p>
                   </a:txBody>
@@ -8038,7 +7884,7 @@
                           <a:latin typeface="Meiryo"/>
                           <a:ea typeface="Meiryo"/>
                         </a:rPr>
-                        <a:t>25,001 - 30,000</a:t>
+                        <a:t>20,001 - 25,000</a:t>
                       </a:r>
                     </a:p>
                   </a:txBody>
@@ -8062,7 +7908,7 @@
                           <a:latin typeface="Meiryo"/>
                           <a:ea typeface="Meiryo"/>
                         </a:rPr>
-                        <a:t>北海道札幌市中央区南二条西十一丁目</a:t>
+                        <a:t>〒060-0003 北海道札幌市中央区北3条西1丁目2-9</a:t>
                       </a:r>
                     </a:p>
                   </a:txBody>
@@ -8112,7 +7958,7 @@
                           <a:latin typeface="Meiryo"/>
                           <a:ea typeface="Meiryo"/>
                         </a:rPr>
-                        <a:t>ANAクラウンプラザホテル札幌</a:t>
+                        <a:t>京王プラザホテル札幌</a:t>
                       </a:r>
                     </a:p>
                   </a:txBody>
@@ -8160,31 +8006,31 @@
                           <a:latin typeface="Meiryo"/>
                           <a:ea typeface="Meiryo"/>
                         </a:rPr>
-                        <a:t>412</a:t>
-                      </a:r>
-                    </a:p>
-                  </a:txBody>
-                  <a:tcPr anchor="ctr">
-                    <a:solidFill>
-                      <a:srgbClr val="F3F4F6"/>
-                    </a:solidFill>
-                  </a:tcPr>
-                </a:tc>
-                <a:tc>
-                  <a:txBody>
-                    <a:bodyPr/>
-                    <a:lstStyle/>
-                    <a:p>
-                      <a:pPr algn="ctr"/>
-                      <a:r>
-                        <a:rPr sz="900" b="0">
-                          <a:solidFill>
-                            <a:srgbClr val="1F2937"/>
-                          </a:solidFill>
-                          <a:latin typeface="Meiryo"/>
-                          <a:ea typeface="Meiryo"/>
-                        </a:rPr>
-                        <a:t>1974年</a:t>
+                        <a:t>483</a:t>
+                      </a:r>
+                    </a:p>
+                  </a:txBody>
+                  <a:tcPr anchor="ctr">
+                    <a:solidFill>
+                      <a:srgbClr val="F3F4F6"/>
+                    </a:solidFill>
+                  </a:tcPr>
+                </a:tc>
+                <a:tc>
+                  <a:txBody>
+                    <a:bodyPr/>
+                    <a:lstStyle/>
+                    <a:p>
+                      <a:pPr algn="ctr"/>
+                      <a:r>
+                        <a:rPr sz="900" b="0">
+                          <a:solidFill>
+                            <a:srgbClr val="1F2937"/>
+                          </a:solidFill>
+                          <a:latin typeface="Meiryo"/>
+                          <a:ea typeface="Meiryo"/>
+                        </a:rPr>
+                        <a:t>1982年</a:t>
                       </a:r>
                     </a:p>
                   </a:txBody>
@@ -8208,7 +8054,7 @@
                           <a:latin typeface="Meiryo"/>
                           <a:ea typeface="Meiryo"/>
                         </a:rPr>
-                        <a:t>20,001 - 25,000</a:t>
+                        <a:t>30,001 - 35,000</a:t>
                       </a:r>
                     </a:p>
                   </a:txBody>
@@ -8232,7 +8078,7 @@
                           <a:latin typeface="Meiryo"/>
                           <a:ea typeface="Meiryo"/>
                         </a:rPr>
-                        <a:t>〒060-0003 北海道札幌市中央区北3条西1丁目2-9</a:t>
+                        <a:t>〒060-0005 北海道札幌市中央区北5条西7丁目2-1</a:t>
                       </a:r>
                     </a:p>
                   </a:txBody>
@@ -8282,79 +8128,79 @@
                           <a:latin typeface="Meiryo"/>
                           <a:ea typeface="Meiryo"/>
                         </a:rPr>
-                        <a:t>京王プラザホテル札幌</a:t>
-                      </a:r>
-                    </a:p>
-                  </a:txBody>
-                  <a:tcPr anchor="ctr">
-                    <a:solidFill>
-                      <a:srgbClr val="FFFFFF"/>
-                    </a:solidFill>
-                  </a:tcPr>
-                </a:tc>
-                <a:tc>
-                  <a:txBody>
-                    <a:bodyPr/>
-                    <a:lstStyle/>
-                    <a:p>
-                      <a:pPr algn="ctr"/>
-                      <a:r>
-                        <a:rPr sz="900" b="0">
-                          <a:solidFill>
-                            <a:srgbClr val="1F2937"/>
-                          </a:solidFill>
-                          <a:latin typeface="Meiryo"/>
-                          <a:ea typeface="Meiryo"/>
-                        </a:rPr>
-                        <a:t>シティホテル</a:t>
-                      </a:r>
-                    </a:p>
-                  </a:txBody>
-                  <a:tcPr anchor="ctr">
-                    <a:solidFill>
-                      <a:srgbClr val="FFFFFF"/>
-                    </a:solidFill>
-                  </a:tcPr>
-                </a:tc>
-                <a:tc>
-                  <a:txBody>
-                    <a:bodyPr/>
-                    <a:lstStyle/>
-                    <a:p>
-                      <a:pPr algn="ctr"/>
-                      <a:r>
-                        <a:rPr sz="900" b="0">
-                          <a:solidFill>
-                            <a:srgbClr val="1F2937"/>
-                          </a:solidFill>
-                          <a:latin typeface="Meiryo"/>
-                          <a:ea typeface="Meiryo"/>
-                        </a:rPr>
-                        <a:t>483</a:t>
-                      </a:r>
-                    </a:p>
-                  </a:txBody>
-                  <a:tcPr anchor="ctr">
-                    <a:solidFill>
-                      <a:srgbClr val="FFFFFF"/>
-                    </a:solidFill>
-                  </a:tcPr>
-                </a:tc>
-                <a:tc>
-                  <a:txBody>
-                    <a:bodyPr/>
-                    <a:lstStyle/>
-                    <a:p>
-                      <a:pPr algn="ctr"/>
-                      <a:r>
-                        <a:rPr sz="900" b="0">
-                          <a:solidFill>
-                            <a:srgbClr val="1F2937"/>
-                          </a:solidFill>
-                          <a:latin typeface="Meiryo"/>
-                          <a:ea typeface="Meiryo"/>
-                        </a:rPr>
-                        <a:t>1982年</a:t>
+                        <a:t>グランドメルキュール札幌大通公園</a:t>
+                      </a:r>
+                    </a:p>
+                  </a:txBody>
+                  <a:tcPr anchor="ctr">
+                    <a:solidFill>
+                      <a:srgbClr val="FFFFFF"/>
+                    </a:solidFill>
+                  </a:tcPr>
+                </a:tc>
+                <a:tc>
+                  <a:txBody>
+                    <a:bodyPr/>
+                    <a:lstStyle/>
+                    <a:p>
+                      <a:pPr algn="ctr"/>
+                      <a:r>
+                        <a:rPr sz="900" b="0">
+                          <a:solidFill>
+                            <a:srgbClr val="1F2937"/>
+                          </a:solidFill>
+                          <a:latin typeface="Meiryo"/>
+                          <a:ea typeface="Meiryo"/>
+                        </a:rPr>
+                        <a:t>リゾートホテル</a:t>
+                      </a:r>
+                    </a:p>
+                  </a:txBody>
+                  <a:tcPr anchor="ctr">
+                    <a:solidFill>
+                      <a:srgbClr val="FFFFFF"/>
+                    </a:solidFill>
+                  </a:tcPr>
+                </a:tc>
+                <a:tc>
+                  <a:txBody>
+                    <a:bodyPr/>
+                    <a:lstStyle/>
+                    <a:p>
+                      <a:pPr algn="ctr"/>
+                      <a:r>
+                        <a:rPr sz="900" b="0">
+                          <a:solidFill>
+                            <a:srgbClr val="1F2937"/>
+                          </a:solidFill>
+                          <a:latin typeface="Meiryo"/>
+                          <a:ea typeface="Meiryo"/>
+                        </a:rPr>
+                        <a:t>294</a:t>
+                      </a:r>
+                    </a:p>
+                  </a:txBody>
+                  <a:tcPr anchor="ctr">
+                    <a:solidFill>
+                      <a:srgbClr val="FFFFFF"/>
+                    </a:solidFill>
+                  </a:tcPr>
+                </a:tc>
+                <a:tc>
+                  <a:txBody>
+                    <a:bodyPr/>
+                    <a:lstStyle/>
+                    <a:p>
+                      <a:pPr algn="ctr"/>
+                      <a:r>
+                        <a:rPr sz="900" b="0">
+                          <a:solidFill>
+                            <a:srgbClr val="1F2937"/>
+                          </a:solidFill>
+                          <a:latin typeface="Meiryo"/>
+                          <a:ea typeface="Meiryo"/>
+                        </a:rPr>
+                        <a:t>1992年</a:t>
                       </a:r>
                     </a:p>
                   </a:txBody>
@@ -8378,7 +8224,7 @@
                           <a:latin typeface="Meiryo"/>
                           <a:ea typeface="Meiryo"/>
                         </a:rPr>
-                        <a:t>30,001 - 35,000</a:t>
+                        <a:t>25,001 - 30,000</a:t>
                       </a:r>
                     </a:p>
                   </a:txBody>
@@ -8402,7 +8248,7 @@
                           <a:latin typeface="Meiryo"/>
                           <a:ea typeface="Meiryo"/>
                         </a:rPr>
-                        <a:t>〒060-0005 北海道札幌市中央区北5条西7丁目2-1</a:t>
+                        <a:t>〒060-0001 北海道札幌市中央区北1条西11丁目</a:t>
                       </a:r>
                     </a:p>
                   </a:txBody>
@@ -8452,79 +8298,79 @@
                           <a:latin typeface="Meiryo"/>
                           <a:ea typeface="Meiryo"/>
                         </a:rPr>
-                        <a:t>グランドメルキュール札幌大通公園</a:t>
-                      </a:r>
-                    </a:p>
-                  </a:txBody>
-                  <a:tcPr anchor="ctr">
-                    <a:solidFill>
-                      <a:srgbClr val="F3F4F6"/>
-                    </a:solidFill>
-                  </a:tcPr>
-                </a:tc>
-                <a:tc>
-                  <a:txBody>
-                    <a:bodyPr/>
-                    <a:lstStyle/>
-                    <a:p>
-                      <a:pPr algn="ctr"/>
-                      <a:r>
-                        <a:rPr sz="900" b="0">
-                          <a:solidFill>
-                            <a:srgbClr val="1F2937"/>
-                          </a:solidFill>
-                          <a:latin typeface="Meiryo"/>
-                          <a:ea typeface="Meiryo"/>
-                        </a:rPr>
-                        <a:t>リゾートホテル</a:t>
-                      </a:r>
-                    </a:p>
-                  </a:txBody>
-                  <a:tcPr anchor="ctr">
-                    <a:solidFill>
-                      <a:srgbClr val="F3F4F6"/>
-                    </a:solidFill>
-                  </a:tcPr>
-                </a:tc>
-                <a:tc>
-                  <a:txBody>
-                    <a:bodyPr/>
-                    <a:lstStyle/>
-                    <a:p>
-                      <a:pPr algn="ctr"/>
-                      <a:r>
-                        <a:rPr sz="900" b="0">
-                          <a:solidFill>
-                            <a:srgbClr val="1F2937"/>
-                          </a:solidFill>
-                          <a:latin typeface="Meiryo"/>
-                          <a:ea typeface="Meiryo"/>
-                        </a:rPr>
-                        <a:t>294</a:t>
-                      </a:r>
-                    </a:p>
-                  </a:txBody>
-                  <a:tcPr anchor="ctr">
-                    <a:solidFill>
-                      <a:srgbClr val="F3F4F6"/>
-                    </a:solidFill>
-                  </a:tcPr>
-                </a:tc>
-                <a:tc>
-                  <a:txBody>
-                    <a:bodyPr/>
-                    <a:lstStyle/>
-                    <a:p>
-                      <a:pPr algn="ctr"/>
-                      <a:r>
-                        <a:rPr sz="900" b="0">
-                          <a:solidFill>
-                            <a:srgbClr val="1F2937"/>
-                          </a:solidFill>
-                          <a:latin typeface="Meiryo"/>
-                          <a:ea typeface="Meiryo"/>
-                        </a:rPr>
-                        <a:t>1992年</a:t>
+                        <a:t>ホテルモントレ札幌</a:t>
+                      </a:r>
+                    </a:p>
+                  </a:txBody>
+                  <a:tcPr anchor="ctr">
+                    <a:solidFill>
+                      <a:srgbClr val="F3F4F6"/>
+                    </a:solidFill>
+                  </a:tcPr>
+                </a:tc>
+                <a:tc>
+                  <a:txBody>
+                    <a:bodyPr/>
+                    <a:lstStyle/>
+                    <a:p>
+                      <a:pPr algn="ctr"/>
+                      <a:r>
+                        <a:rPr sz="900" b="0">
+                          <a:solidFill>
+                            <a:srgbClr val="1F2937"/>
+                          </a:solidFill>
+                          <a:latin typeface="Meiryo"/>
+                          <a:ea typeface="Meiryo"/>
+                        </a:rPr>
+                        <a:t>シティホテル</a:t>
+                      </a:r>
+                    </a:p>
+                  </a:txBody>
+                  <a:tcPr anchor="ctr">
+                    <a:solidFill>
+                      <a:srgbClr val="F3F4F6"/>
+                    </a:solidFill>
+                  </a:tcPr>
+                </a:tc>
+                <a:tc>
+                  <a:txBody>
+                    <a:bodyPr/>
+                    <a:lstStyle/>
+                    <a:p>
+                      <a:pPr algn="ctr"/>
+                      <a:r>
+                        <a:rPr sz="900" b="0">
+                          <a:solidFill>
+                            <a:srgbClr val="1F2937"/>
+                          </a:solidFill>
+                          <a:latin typeface="Meiryo"/>
+                          <a:ea typeface="Meiryo"/>
+                        </a:rPr>
+                        <a:t>250</a:t>
+                      </a:r>
+                    </a:p>
+                  </a:txBody>
+                  <a:tcPr anchor="ctr">
+                    <a:solidFill>
+                      <a:srgbClr val="F3F4F6"/>
+                    </a:solidFill>
+                  </a:tcPr>
+                </a:tc>
+                <a:tc>
+                  <a:txBody>
+                    <a:bodyPr/>
+                    <a:lstStyle/>
+                    <a:p>
+                      <a:pPr algn="ctr"/>
+                      <a:r>
+                        <a:rPr sz="900" b="0">
+                          <a:solidFill>
+                            <a:srgbClr val="1F2937"/>
+                          </a:solidFill>
+                          <a:latin typeface="Meiryo"/>
+                          <a:ea typeface="Meiryo"/>
+                        </a:rPr>
+                        <a:t>1994年</a:t>
                       </a:r>
                     </a:p>
                   </a:txBody>
@@ -8548,7 +8394,7 @@
                           <a:latin typeface="Meiryo"/>
                           <a:ea typeface="Meiryo"/>
                         </a:rPr>
-                        <a:t>25,001 - 30,000</a:t>
+                        <a:t>15,001 - 20,000</a:t>
                       </a:r>
                     </a:p>
                   </a:txBody>
@@ -8572,7 +8418,7 @@
                           <a:latin typeface="Meiryo"/>
                           <a:ea typeface="Meiryo"/>
                         </a:rPr>
-                        <a:t>〒060-0001 北海道札幌市中央区北1条西11丁目</a:t>
+                        <a:t>〒060-0034 北海道札幌市中央区北4条東1丁目3</a:t>
                       </a:r>
                     </a:p>
                   </a:txBody>
@@ -8622,7 +8468,7 @@
                           <a:latin typeface="Meiryo"/>
                           <a:ea typeface="Meiryo"/>
                         </a:rPr>
-                        <a:t>ホテルモントレ札幌</a:t>
+                        <a:t>フェアフィールド・バイ・マリオット札幌</a:t>
                       </a:r>
                     </a:p>
                   </a:txBody>
@@ -8670,31 +8516,31 @@
                           <a:latin typeface="Meiryo"/>
                           <a:ea typeface="Meiryo"/>
                         </a:rPr>
-                        <a:t>250</a:t>
-                      </a:r>
-                    </a:p>
-                  </a:txBody>
-                  <a:tcPr anchor="ctr">
-                    <a:solidFill>
-                      <a:srgbClr val="FFFFFF"/>
-                    </a:solidFill>
-                  </a:tcPr>
-                </a:tc>
-                <a:tc>
-                  <a:txBody>
-                    <a:bodyPr/>
-                    <a:lstStyle/>
-                    <a:p>
-                      <a:pPr algn="ctr"/>
-                      <a:r>
-                        <a:rPr sz="900" b="0">
-                          <a:solidFill>
-                            <a:srgbClr val="1F2937"/>
-                          </a:solidFill>
-                          <a:latin typeface="Meiryo"/>
-                          <a:ea typeface="Meiryo"/>
-                        </a:rPr>
-                        <a:t>1994年</a:t>
+                        <a:t>254</a:t>
+                      </a:r>
+                    </a:p>
+                  </a:txBody>
+                  <a:tcPr anchor="ctr">
+                    <a:solidFill>
+                      <a:srgbClr val="FFFFFF"/>
+                    </a:solidFill>
+                  </a:tcPr>
+                </a:tc>
+                <a:tc>
+                  <a:txBody>
+                    <a:bodyPr/>
+                    <a:lstStyle/>
+                    <a:p>
+                      <a:pPr algn="ctr"/>
+                      <a:r>
+                        <a:rPr sz="900" b="0">
+                          <a:solidFill>
+                            <a:srgbClr val="1F2937"/>
+                          </a:solidFill>
+                          <a:latin typeface="Meiryo"/>
+                          <a:ea typeface="Meiryo"/>
+                        </a:rPr>
+                        <a:t>1995年</a:t>
                       </a:r>
                     </a:p>
                   </a:txBody>
@@ -8718,7 +8564,7 @@
                           <a:latin typeface="Meiryo"/>
                           <a:ea typeface="Meiryo"/>
                         </a:rPr>
-                        <a:t>15,001 - 20,000</a:t>
+                        <a:t>30,001 - 35,000</a:t>
                       </a:r>
                     </a:p>
                   </a:txBody>
@@ -8742,7 +8588,7 @@
                           <a:latin typeface="Meiryo"/>
                           <a:ea typeface="Meiryo"/>
                         </a:rPr>
-                        <a:t>〒060-0034 北海道札幌市中央区北4条東1丁目3</a:t>
+                        <a:t>北海道札幌市中央区南四条東一丁目</a:t>
                       </a:r>
                     </a:p>
                   </a:txBody>
@@ -8792,7 +8638,7 @@
                           <a:latin typeface="Meiryo"/>
                           <a:ea typeface="Meiryo"/>
                         </a:rPr>
-                        <a:t>フェアフィールド・バイ・マリオット札幌</a:t>
+                        <a:t>JRタワーホテル日航札幌</a:t>
                       </a:r>
                     </a:p>
                   </a:txBody>
@@ -8840,31 +8686,31 @@
                           <a:latin typeface="Meiryo"/>
                           <a:ea typeface="Meiryo"/>
                         </a:rPr>
-                        <a:t>254</a:t>
-                      </a:r>
-                    </a:p>
-                  </a:txBody>
-                  <a:tcPr anchor="ctr">
-                    <a:solidFill>
-                      <a:srgbClr val="F3F4F6"/>
-                    </a:solidFill>
-                  </a:tcPr>
-                </a:tc>
-                <a:tc>
-                  <a:txBody>
-                    <a:bodyPr/>
-                    <a:lstStyle/>
-                    <a:p>
-                      <a:pPr algn="ctr"/>
-                      <a:r>
-                        <a:rPr sz="900" b="0">
-                          <a:solidFill>
-                            <a:srgbClr val="1F2937"/>
-                          </a:solidFill>
-                          <a:latin typeface="Meiryo"/>
-                          <a:ea typeface="Meiryo"/>
-                        </a:rPr>
-                        <a:t>1995年</a:t>
+                        <a:t>342</a:t>
+                      </a:r>
+                    </a:p>
+                  </a:txBody>
+                  <a:tcPr anchor="ctr">
+                    <a:solidFill>
+                      <a:srgbClr val="F3F4F6"/>
+                    </a:solidFill>
+                  </a:tcPr>
+                </a:tc>
+                <a:tc>
+                  <a:txBody>
+                    <a:bodyPr/>
+                    <a:lstStyle/>
+                    <a:p>
+                      <a:pPr algn="ctr"/>
+                      <a:r>
+                        <a:rPr sz="900" b="0">
+                          <a:solidFill>
+                            <a:srgbClr val="1F2937"/>
+                          </a:solidFill>
+                          <a:latin typeface="Meiryo"/>
+                          <a:ea typeface="Meiryo"/>
+                        </a:rPr>
+                        <a:t>2003年</a:t>
                       </a:r>
                     </a:p>
                   </a:txBody>
@@ -8888,7 +8734,7 @@
                           <a:latin typeface="Meiryo"/>
                           <a:ea typeface="Meiryo"/>
                         </a:rPr>
-                        <a:t>30,001 - 35,000</a:t>
+                        <a:t>40,001 - 45,000</a:t>
                       </a:r>
                     </a:p>
                   </a:txBody>
@@ -8912,7 +8758,7 @@
                           <a:latin typeface="Meiryo"/>
                           <a:ea typeface="Meiryo"/>
                         </a:rPr>
-                        <a:t>北海道札幌市中央区南四条東一丁目</a:t>
+                        <a:t>〒060-0005 北海道札幌市中央区北5条西2丁目5</a:t>
                       </a:r>
                     </a:p>
                   </a:txBody>
@@ -8962,79 +8808,79 @@
                           <a:latin typeface="Meiryo"/>
                           <a:ea typeface="Meiryo"/>
                         </a:rPr>
-                        <a:t>JRタワーホテル日航札幌</a:t>
-                      </a:r>
-                    </a:p>
-                  </a:txBody>
-                  <a:tcPr anchor="ctr">
-                    <a:solidFill>
-                      <a:srgbClr val="FFFFFF"/>
-                    </a:solidFill>
-                  </a:tcPr>
-                </a:tc>
-                <a:tc>
-                  <a:txBody>
-                    <a:bodyPr/>
-                    <a:lstStyle/>
-                    <a:p>
-                      <a:pPr algn="ctr"/>
-                      <a:r>
-                        <a:rPr sz="900" b="0">
-                          <a:solidFill>
-                            <a:srgbClr val="1F2937"/>
-                          </a:solidFill>
-                          <a:latin typeface="Meiryo"/>
-                          <a:ea typeface="Meiryo"/>
-                        </a:rPr>
-                        <a:t>シティホテル</a:t>
-                      </a:r>
-                    </a:p>
-                  </a:txBody>
-                  <a:tcPr anchor="ctr">
-                    <a:solidFill>
-                      <a:srgbClr val="FFFFFF"/>
-                    </a:solidFill>
-                  </a:tcPr>
-                </a:tc>
-                <a:tc>
-                  <a:txBody>
-                    <a:bodyPr/>
-                    <a:lstStyle/>
-                    <a:p>
-                      <a:pPr algn="ctr"/>
-                      <a:r>
-                        <a:rPr sz="900" b="0">
-                          <a:solidFill>
-                            <a:srgbClr val="1F2937"/>
-                          </a:solidFill>
-                          <a:latin typeface="Meiryo"/>
-                          <a:ea typeface="Meiryo"/>
-                        </a:rPr>
-                        <a:t>342</a:t>
-                      </a:r>
-                    </a:p>
-                  </a:txBody>
-                  <a:tcPr anchor="ctr">
-                    <a:solidFill>
-                      <a:srgbClr val="FFFFFF"/>
-                    </a:solidFill>
-                  </a:tcPr>
-                </a:tc>
-                <a:tc>
-                  <a:txBody>
-                    <a:bodyPr/>
-                    <a:lstStyle/>
-                    <a:p>
-                      <a:pPr algn="ctr"/>
-                      <a:r>
-                        <a:rPr sz="900" b="0">
-                          <a:solidFill>
-                            <a:srgbClr val="1F2937"/>
-                          </a:solidFill>
-                          <a:latin typeface="Meiryo"/>
-                          <a:ea typeface="Meiryo"/>
-                        </a:rPr>
-                        <a:t>2003年</a:t>
+                        <a:t>ホテルグレイスリー札幌</a:t>
+                      </a:r>
+                    </a:p>
+                  </a:txBody>
+                  <a:tcPr anchor="ctr">
+                    <a:solidFill>
+                      <a:srgbClr val="FFFFFF"/>
+                    </a:solidFill>
+                  </a:tcPr>
+                </a:tc>
+                <a:tc>
+                  <a:txBody>
+                    <a:bodyPr/>
+                    <a:lstStyle/>
+                    <a:p>
+                      <a:pPr algn="ctr"/>
+                      <a:r>
+                        <a:rPr sz="900" b="0">
+                          <a:solidFill>
+                            <a:srgbClr val="1F2937"/>
+                          </a:solidFill>
+                          <a:latin typeface="Meiryo"/>
+                          <a:ea typeface="Meiryo"/>
+                        </a:rPr>
+                        <a:t>ビジネスホテル</a:t>
+                      </a:r>
+                    </a:p>
+                  </a:txBody>
+                  <a:tcPr anchor="ctr">
+                    <a:solidFill>
+                      <a:srgbClr val="FFFFFF"/>
+                    </a:solidFill>
+                  </a:tcPr>
+                </a:tc>
+                <a:tc>
+                  <a:txBody>
+                    <a:bodyPr/>
+                    <a:lstStyle/>
+                    <a:p>
+                      <a:pPr algn="ctr"/>
+                      <a:r>
+                        <a:rPr sz="900" b="0">
+                          <a:solidFill>
+                            <a:srgbClr val="1F2937"/>
+                          </a:solidFill>
+                          <a:latin typeface="Meiryo"/>
+                          <a:ea typeface="Meiryo"/>
+                        </a:rPr>
+                        <a:t>440</a:t>
+                      </a:r>
+                    </a:p>
+                  </a:txBody>
+                  <a:tcPr anchor="ctr">
+                    <a:solidFill>
+                      <a:srgbClr val="FFFFFF"/>
+                    </a:solidFill>
+                  </a:tcPr>
+                </a:tc>
+                <a:tc>
+                  <a:txBody>
+                    <a:bodyPr/>
+                    <a:lstStyle/>
+                    <a:p>
+                      <a:pPr algn="ctr"/>
+                      <a:r>
+                        <a:rPr sz="900" b="0">
+                          <a:solidFill>
+                            <a:srgbClr val="1F2937"/>
+                          </a:solidFill>
+                          <a:latin typeface="Meiryo"/>
+                          <a:ea typeface="Meiryo"/>
+                        </a:rPr>
+                        <a:t>2006年</a:t>
                       </a:r>
                     </a:p>
                   </a:txBody>
@@ -9058,7 +8904,7 @@
                           <a:latin typeface="Meiryo"/>
                           <a:ea typeface="Meiryo"/>
                         </a:rPr>
-                        <a:t>40,001 - 45,000</a:t>
+                        <a:t>25,001 - 30,000</a:t>
                       </a:r>
                     </a:p>
                   </a:txBody>
@@ -9082,7 +8928,7 @@
                           <a:latin typeface="Meiryo"/>
                           <a:ea typeface="Meiryo"/>
                         </a:rPr>
-                        <a:t>〒060-0005 北海道札幌市中央区北5条西2丁目5</a:t>
+                        <a:t>北海道札幌市中央区北四条西四丁目</a:t>
                       </a:r>
                     </a:p>
                   </a:txBody>
@@ -9132,79 +8978,79 @@
                           <a:latin typeface="Meiryo"/>
                           <a:ea typeface="Meiryo"/>
                         </a:rPr>
-                        <a:t>ホテルグレイスリー札幌</a:t>
-                      </a:r>
-                    </a:p>
-                  </a:txBody>
-                  <a:tcPr anchor="ctr">
-                    <a:solidFill>
-                      <a:srgbClr val="F3F4F6"/>
-                    </a:solidFill>
-                  </a:tcPr>
-                </a:tc>
-                <a:tc>
-                  <a:txBody>
-                    <a:bodyPr/>
-                    <a:lstStyle/>
-                    <a:p>
-                      <a:pPr algn="ctr"/>
-                      <a:r>
-                        <a:rPr sz="900" b="0">
-                          <a:solidFill>
-                            <a:srgbClr val="1F2937"/>
-                          </a:solidFill>
-                          <a:latin typeface="Meiryo"/>
-                          <a:ea typeface="Meiryo"/>
-                        </a:rPr>
-                        <a:t>ビジネスホテル</a:t>
-                      </a:r>
-                    </a:p>
-                  </a:txBody>
-                  <a:tcPr anchor="ctr">
-                    <a:solidFill>
-                      <a:srgbClr val="F3F4F6"/>
-                    </a:solidFill>
-                  </a:tcPr>
-                </a:tc>
-                <a:tc>
-                  <a:txBody>
-                    <a:bodyPr/>
-                    <a:lstStyle/>
-                    <a:p>
-                      <a:pPr algn="ctr"/>
-                      <a:r>
-                        <a:rPr sz="900" b="0">
-                          <a:solidFill>
-                            <a:srgbClr val="1F2937"/>
-                          </a:solidFill>
-                          <a:latin typeface="Meiryo"/>
-                          <a:ea typeface="Meiryo"/>
-                        </a:rPr>
-                        <a:t>440</a:t>
-                      </a:r>
-                    </a:p>
-                  </a:txBody>
-                  <a:tcPr anchor="ctr">
-                    <a:solidFill>
-                      <a:srgbClr val="F3F4F6"/>
-                    </a:solidFill>
-                  </a:tcPr>
-                </a:tc>
-                <a:tc>
-                  <a:txBody>
-                    <a:bodyPr/>
-                    <a:lstStyle/>
-                    <a:p>
-                      <a:pPr algn="ctr"/>
-                      <a:r>
-                        <a:rPr sz="900" b="0">
-                          <a:solidFill>
-                            <a:srgbClr val="1F2937"/>
-                          </a:solidFill>
-                          <a:latin typeface="Meiryo"/>
-                          <a:ea typeface="Meiryo"/>
-                        </a:rPr>
-                        <a:t>2006年</a:t>
+                        <a:t>クロスホテル札幌</a:t>
+                      </a:r>
+                    </a:p>
+                  </a:txBody>
+                  <a:tcPr anchor="ctr">
+                    <a:solidFill>
+                      <a:srgbClr val="F3F4F6"/>
+                    </a:solidFill>
+                  </a:tcPr>
+                </a:tc>
+                <a:tc>
+                  <a:txBody>
+                    <a:bodyPr/>
+                    <a:lstStyle/>
+                    <a:p>
+                      <a:pPr algn="ctr"/>
+                      <a:r>
+                        <a:rPr sz="900" b="0">
+                          <a:solidFill>
+                            <a:srgbClr val="1F2937"/>
+                          </a:solidFill>
+                          <a:latin typeface="Meiryo"/>
+                          <a:ea typeface="Meiryo"/>
+                        </a:rPr>
+                        <a:t>シティホテル</a:t>
+                      </a:r>
+                    </a:p>
+                  </a:txBody>
+                  <a:tcPr anchor="ctr">
+                    <a:solidFill>
+                      <a:srgbClr val="F3F4F6"/>
+                    </a:solidFill>
+                  </a:tcPr>
+                </a:tc>
+                <a:tc>
+                  <a:txBody>
+                    <a:bodyPr/>
+                    <a:lstStyle/>
+                    <a:p>
+                      <a:pPr algn="ctr"/>
+                      <a:r>
+                        <a:rPr sz="900" b="0">
+                          <a:solidFill>
+                            <a:srgbClr val="1F2937"/>
+                          </a:solidFill>
+                          <a:latin typeface="Meiryo"/>
+                          <a:ea typeface="Meiryo"/>
+                        </a:rPr>
+                        <a:t>181</a:t>
+                      </a:r>
+                    </a:p>
+                  </a:txBody>
+                  <a:tcPr anchor="ctr">
+                    <a:solidFill>
+                      <a:srgbClr val="F3F4F6"/>
+                    </a:solidFill>
+                  </a:tcPr>
+                </a:tc>
+                <a:tc>
+                  <a:txBody>
+                    <a:bodyPr/>
+                    <a:lstStyle/>
+                    <a:p>
+                      <a:pPr algn="ctr"/>
+                      <a:r>
+                        <a:rPr sz="900" b="0">
+                          <a:solidFill>
+                            <a:srgbClr val="1F2937"/>
+                          </a:solidFill>
+                          <a:latin typeface="Meiryo"/>
+                          <a:ea typeface="Meiryo"/>
+                        </a:rPr>
+                        <a:t>2007年</a:t>
                       </a:r>
                     </a:p>
                   </a:txBody>
@@ -9228,7 +9074,7 @@
                           <a:latin typeface="Meiryo"/>
                           <a:ea typeface="Meiryo"/>
                         </a:rPr>
-                        <a:t>25,001 - 30,000</a:t>
+                        <a:t>20,001 - 25,000</a:t>
                       </a:r>
                     </a:p>
                   </a:txBody>
@@ -9252,7 +9098,7 @@
                           <a:latin typeface="Meiryo"/>
                           <a:ea typeface="Meiryo"/>
                         </a:rPr>
-                        <a:t>北海道札幌市中央区北四条西四丁目</a:t>
+                        <a:t>〒060-0002 北海道札幌市中央区北2条西2丁目23</a:t>
                       </a:r>
                     </a:p>
                   </a:txBody>
@@ -9302,7 +9148,7 @@
                           <a:latin typeface="Meiryo"/>
                           <a:ea typeface="Meiryo"/>
                         </a:rPr>
-                        <a:t>クロスホテル札幌</a:t>
+                        <a:t>メルキュールホテル札幌</a:t>
                       </a:r>
                     </a:p>
                   </a:txBody>
@@ -9350,31 +9196,31 @@
                           <a:latin typeface="Meiryo"/>
                           <a:ea typeface="Meiryo"/>
                         </a:rPr>
-                        <a:t>181</a:t>
-                      </a:r>
-                    </a:p>
-                  </a:txBody>
-                  <a:tcPr anchor="ctr">
-                    <a:solidFill>
-                      <a:srgbClr val="FFFFFF"/>
-                    </a:solidFill>
-                  </a:tcPr>
-                </a:tc>
-                <a:tc>
-                  <a:txBody>
-                    <a:bodyPr/>
-                    <a:lstStyle/>
-                    <a:p>
-                      <a:pPr algn="ctr"/>
-                      <a:r>
-                        <a:rPr sz="900" b="0">
-                          <a:solidFill>
-                            <a:srgbClr val="1F2937"/>
-                          </a:solidFill>
-                          <a:latin typeface="Meiryo"/>
-                          <a:ea typeface="Meiryo"/>
-                        </a:rPr>
-                        <a:t>2007年</a:t>
+                        <a:t>285</a:t>
+                      </a:r>
+                    </a:p>
+                  </a:txBody>
+                  <a:tcPr anchor="ctr">
+                    <a:solidFill>
+                      <a:srgbClr val="FFFFFF"/>
+                    </a:solidFill>
+                  </a:tcPr>
+                </a:tc>
+                <a:tc>
+                  <a:txBody>
+                    <a:bodyPr/>
+                    <a:lstStyle/>
+                    <a:p>
+                      <a:pPr algn="ctr"/>
+                      <a:r>
+                        <a:rPr sz="900" b="0">
+                          <a:solidFill>
+                            <a:srgbClr val="1F2937"/>
+                          </a:solidFill>
+                          <a:latin typeface="Meiryo"/>
+                          <a:ea typeface="Meiryo"/>
+                        </a:rPr>
+                        <a:t>2009年</a:t>
                       </a:r>
                     </a:p>
                   </a:txBody>
@@ -9398,7 +9244,7 @@
                           <a:latin typeface="Meiryo"/>
                           <a:ea typeface="Meiryo"/>
                         </a:rPr>
-                        <a:t>20,001 - 25,000</a:t>
+                        <a:t>35,001 - 40,000</a:t>
                       </a:r>
                     </a:p>
                   </a:txBody>
@@ -9422,7 +9268,7 @@
                           <a:latin typeface="Meiryo"/>
                           <a:ea typeface="Meiryo"/>
                         </a:rPr>
-                        <a:t>〒060-0002 北海道札幌市中央区北2条西2丁目23</a:t>
+                        <a:t>〒064-0804 北海道札幌市中央区南4条西2丁目2-4</a:t>
                       </a:r>
                     </a:p>
                   </a:txBody>
@@ -9472,79 +9318,79 @@
                           <a:latin typeface="Meiryo"/>
                           <a:ea typeface="Meiryo"/>
                         </a:rPr>
-                        <a:t>メルキュールホテル札幌</a:t>
-                      </a:r>
-                    </a:p>
-                  </a:txBody>
-                  <a:tcPr anchor="ctr">
-                    <a:solidFill>
-                      <a:srgbClr val="F3F4F6"/>
-                    </a:solidFill>
-                  </a:tcPr>
-                </a:tc>
-                <a:tc>
-                  <a:txBody>
-                    <a:bodyPr/>
-                    <a:lstStyle/>
-                    <a:p>
-                      <a:pPr algn="ctr"/>
-                      <a:r>
-                        <a:rPr sz="900" b="0">
-                          <a:solidFill>
-                            <a:srgbClr val="1F2937"/>
-                          </a:solidFill>
-                          <a:latin typeface="Meiryo"/>
-                          <a:ea typeface="Meiryo"/>
-                        </a:rPr>
-                        <a:t>シティホテル</a:t>
-                      </a:r>
-                    </a:p>
-                  </a:txBody>
-                  <a:tcPr anchor="ctr">
-                    <a:solidFill>
-                      <a:srgbClr val="F3F4F6"/>
-                    </a:solidFill>
-                  </a:tcPr>
-                </a:tc>
-                <a:tc>
-                  <a:txBody>
-                    <a:bodyPr/>
-                    <a:lstStyle/>
-                    <a:p>
-                      <a:pPr algn="ctr"/>
-                      <a:r>
-                        <a:rPr sz="900" b="0">
-                          <a:solidFill>
-                            <a:srgbClr val="1F2937"/>
-                          </a:solidFill>
-                          <a:latin typeface="Meiryo"/>
-                          <a:ea typeface="Meiryo"/>
-                        </a:rPr>
-                        <a:t>285</a:t>
-                      </a:r>
-                    </a:p>
-                  </a:txBody>
-                  <a:tcPr anchor="ctr">
-                    <a:solidFill>
-                      <a:srgbClr val="F3F4F6"/>
-                    </a:solidFill>
-                  </a:tcPr>
-                </a:tc>
-                <a:tc>
-                  <a:txBody>
-                    <a:bodyPr/>
-                    <a:lstStyle/>
-                    <a:p>
-                      <a:pPr algn="ctr"/>
-                      <a:r>
-                        <a:rPr sz="900" b="0">
-                          <a:solidFill>
-                            <a:srgbClr val="1F2937"/>
-                          </a:solidFill>
-                          <a:latin typeface="Meiryo"/>
-                          <a:ea typeface="Meiryo"/>
-                        </a:rPr>
-                        <a:t>2009年</a:t>
+                        <a:t>三井ガーデンホテル札幌</a:t>
+                      </a:r>
+                    </a:p>
+                  </a:txBody>
+                  <a:tcPr anchor="ctr">
+                    <a:solidFill>
+                      <a:srgbClr val="F3F4F6"/>
+                    </a:solidFill>
+                  </a:tcPr>
+                </a:tc>
+                <a:tc>
+                  <a:txBody>
+                    <a:bodyPr/>
+                    <a:lstStyle/>
+                    <a:p>
+                      <a:pPr algn="ctr"/>
+                      <a:r>
+                        <a:rPr sz="900" b="0">
+                          <a:solidFill>
+                            <a:srgbClr val="1F2937"/>
+                          </a:solidFill>
+                          <a:latin typeface="Meiryo"/>
+                          <a:ea typeface="Meiryo"/>
+                        </a:rPr>
+                        <a:t>ビジネスホテル</a:t>
+                      </a:r>
+                    </a:p>
+                  </a:txBody>
+                  <a:tcPr anchor="ctr">
+                    <a:solidFill>
+                      <a:srgbClr val="F3F4F6"/>
+                    </a:solidFill>
+                  </a:tcPr>
+                </a:tc>
+                <a:tc>
+                  <a:txBody>
+                    <a:bodyPr/>
+                    <a:lstStyle/>
+                    <a:p>
+                      <a:pPr algn="ctr"/>
+                      <a:r>
+                        <a:rPr sz="900" b="0">
+                          <a:solidFill>
+                            <a:srgbClr val="1F2937"/>
+                          </a:solidFill>
+                          <a:latin typeface="Meiryo"/>
+                          <a:ea typeface="Meiryo"/>
+                        </a:rPr>
+                        <a:t>177</a:t>
+                      </a:r>
+                    </a:p>
+                  </a:txBody>
+                  <a:tcPr anchor="ctr">
+                    <a:solidFill>
+                      <a:srgbClr val="F3F4F6"/>
+                    </a:solidFill>
+                  </a:tcPr>
+                </a:tc>
+                <a:tc>
+                  <a:txBody>
+                    <a:bodyPr/>
+                    <a:lstStyle/>
+                    <a:p>
+                      <a:pPr algn="ctr"/>
+                      <a:r>
+                        <a:rPr sz="900" b="0">
+                          <a:solidFill>
+                            <a:srgbClr val="1F2937"/>
+                          </a:solidFill>
+                          <a:latin typeface="Meiryo"/>
+                          <a:ea typeface="Meiryo"/>
+                        </a:rPr>
+                        <a:t>2010年</a:t>
                       </a:r>
                     </a:p>
                   </a:txBody>
@@ -9568,7 +9414,7 @@
                           <a:latin typeface="Meiryo"/>
                           <a:ea typeface="Meiryo"/>
                         </a:rPr>
-                        <a:t>35,001 - 40,000</a:t>
+                        <a:t>20,001 - 25,000</a:t>
                       </a:r>
                     </a:p>
                   </a:txBody>
@@ -9592,7 +9438,7 @@
                           <a:latin typeface="Meiryo"/>
                           <a:ea typeface="Meiryo"/>
                         </a:rPr>
-                        <a:t>〒064-0804 北海道札幌市中央区南4条西2丁目2-4</a:t>
+                        <a:t>〒060-0005 北海道札幌市中央区北5条西6丁目18-3</a:t>
                       </a:r>
                     </a:p>
                   </a:txBody>
@@ -9642,7 +9488,7 @@
                           <a:latin typeface="Meiryo"/>
                           <a:ea typeface="Meiryo"/>
                         </a:rPr>
-                        <a:t>三井ガーデンホテル札幌</a:t>
+                        <a:t>ラ・ジェント・ステイ札幌大通</a:t>
                       </a:r>
                     </a:p>
                   </a:txBody>
@@ -9690,31 +9536,31 @@
                           <a:latin typeface="Meiryo"/>
                           <a:ea typeface="Meiryo"/>
                         </a:rPr>
-                        <a:t>177</a:t>
-                      </a:r>
-                    </a:p>
-                  </a:txBody>
-                  <a:tcPr anchor="ctr">
-                    <a:solidFill>
-                      <a:srgbClr val="FFFFFF"/>
-                    </a:solidFill>
-                  </a:tcPr>
-                </a:tc>
-                <a:tc>
-                  <a:txBody>
-                    <a:bodyPr/>
-                    <a:lstStyle/>
-                    <a:p>
-                      <a:pPr algn="ctr"/>
-                      <a:r>
-                        <a:rPr sz="900" b="0">
-                          <a:solidFill>
-                            <a:srgbClr val="1F2937"/>
-                          </a:solidFill>
-                          <a:latin typeface="Meiryo"/>
-                          <a:ea typeface="Meiryo"/>
-                        </a:rPr>
-                        <a:t>2010年</a:t>
+                        <a:t>219</a:t>
+                      </a:r>
+                    </a:p>
+                  </a:txBody>
+                  <a:tcPr anchor="ctr">
+                    <a:solidFill>
+                      <a:srgbClr val="FFFFFF"/>
+                    </a:solidFill>
+                  </a:tcPr>
+                </a:tc>
+                <a:tc>
+                  <a:txBody>
+                    <a:bodyPr/>
+                    <a:lstStyle/>
+                    <a:p>
+                      <a:pPr algn="ctr"/>
+                      <a:r>
+                        <a:rPr sz="900" b="0">
+                          <a:solidFill>
+                            <a:srgbClr val="1F2937"/>
+                          </a:solidFill>
+                          <a:latin typeface="Meiryo"/>
+                          <a:ea typeface="Meiryo"/>
+                        </a:rPr>
+                        <a:t>2016年</a:t>
                       </a:r>
                     </a:p>
                   </a:txBody>
@@ -9738,7 +9584,7 @@
                           <a:latin typeface="Meiryo"/>
                           <a:ea typeface="Meiryo"/>
                         </a:rPr>
-                        <a:t>20,001 - 25,000</a:t>
+                        <a:t>35,001 - 40,000</a:t>
                       </a:r>
                     </a:p>
                   </a:txBody>
@@ -9762,7 +9608,7 @@
                           <a:latin typeface="Meiryo"/>
                           <a:ea typeface="Meiryo"/>
                         </a:rPr>
-                        <a:t>〒060-0005 北海道札幌市中央区北5条西6丁目18-3</a:t>
+                        <a:t>北海道札幌市中央区南二条西五丁目２６番地</a:t>
                       </a:r>
                     </a:p>
                   </a:txBody>
@@ -9812,7 +9658,7 @@
                           <a:latin typeface="Meiryo"/>
                           <a:ea typeface="Meiryo"/>
                         </a:rPr>
-                        <a:t>ラ・ジェント・ステイ札幌大通</a:t>
+                        <a:t>京王プレリアホテル 札幌</a:t>
                       </a:r>
                     </a:p>
                   </a:txBody>
@@ -9860,31 +9706,31 @@
                           <a:latin typeface="Meiryo"/>
                           <a:ea typeface="Meiryo"/>
                         </a:rPr>
-                        <a:t>219</a:t>
-                      </a:r>
-                    </a:p>
-                  </a:txBody>
-                  <a:tcPr anchor="ctr">
-                    <a:solidFill>
-                      <a:srgbClr val="F3F4F6"/>
-                    </a:solidFill>
-                  </a:tcPr>
-                </a:tc>
-                <a:tc>
-                  <a:txBody>
-                    <a:bodyPr/>
-                    <a:lstStyle/>
-                    <a:p>
-                      <a:pPr algn="ctr"/>
-                      <a:r>
-                        <a:rPr sz="900" b="0">
-                          <a:solidFill>
-                            <a:srgbClr val="1F2937"/>
-                          </a:solidFill>
-                          <a:latin typeface="Meiryo"/>
-                          <a:ea typeface="Meiryo"/>
-                        </a:rPr>
-                        <a:t>2016年</a:t>
+                        <a:t>337</a:t>
+                      </a:r>
+                    </a:p>
+                  </a:txBody>
+                  <a:tcPr anchor="ctr">
+                    <a:solidFill>
+                      <a:srgbClr val="F3F4F6"/>
+                    </a:solidFill>
+                  </a:tcPr>
+                </a:tc>
+                <a:tc>
+                  <a:txBody>
+                    <a:bodyPr/>
+                    <a:lstStyle/>
+                    <a:p>
+                      <a:pPr algn="ctr"/>
+                      <a:r>
+                        <a:rPr sz="900" b="0">
+                          <a:solidFill>
+                            <a:srgbClr val="1F2937"/>
+                          </a:solidFill>
+                          <a:latin typeface="Meiryo"/>
+                          <a:ea typeface="Meiryo"/>
+                        </a:rPr>
+                        <a:t>2019年</a:t>
                       </a:r>
                     </a:p>
                   </a:txBody>
@@ -9908,7 +9754,7 @@
                           <a:latin typeface="Meiryo"/>
                           <a:ea typeface="Meiryo"/>
                         </a:rPr>
-                        <a:t>35,001 - 40,000</a:t>
+                        <a:t>25,001 - 30,000</a:t>
                       </a:r>
                     </a:p>
                   </a:txBody>
@@ -9932,7 +9778,7 @@
                           <a:latin typeface="Meiryo"/>
                           <a:ea typeface="Meiryo"/>
                         </a:rPr>
-                        <a:t>北海道札幌市中央区南二条西五丁目２６番地</a:t>
+                        <a:t>〒060-0808 北海道札幌市北区北8条西4丁目11-1</a:t>
                       </a:r>
                     </a:p>
                   </a:txBody>
@@ -9982,7 +9828,7 @@
                           <a:latin typeface="Meiryo"/>
                           <a:ea typeface="Meiryo"/>
                         </a:rPr>
-                        <a:t>京王プレリアホテル 札幌</a:t>
+                        <a:t>三井ガーデンホテル札幌ウエスト</a:t>
                       </a:r>
                     </a:p>
                   </a:txBody>
@@ -10030,31 +9876,31 @@
                           <a:latin typeface="Meiryo"/>
                           <a:ea typeface="Meiryo"/>
                         </a:rPr>
-                        <a:t>337</a:t>
-                      </a:r>
-                    </a:p>
-                  </a:txBody>
-                  <a:tcPr anchor="ctr">
-                    <a:solidFill>
-                      <a:srgbClr val="FFFFFF"/>
-                    </a:solidFill>
-                  </a:tcPr>
-                </a:tc>
-                <a:tc>
-                  <a:txBody>
-                    <a:bodyPr/>
-                    <a:lstStyle/>
-                    <a:p>
-                      <a:pPr algn="ctr"/>
-                      <a:r>
-                        <a:rPr sz="900" b="0">
-                          <a:solidFill>
-                            <a:srgbClr val="1F2937"/>
-                          </a:solidFill>
-                          <a:latin typeface="Meiryo"/>
-                          <a:ea typeface="Meiryo"/>
-                        </a:rPr>
-                        <a:t>2019年</a:t>
+                        <a:t>169</a:t>
+                      </a:r>
+                    </a:p>
+                  </a:txBody>
+                  <a:tcPr anchor="ctr">
+                    <a:solidFill>
+                      <a:srgbClr val="FFFFFF"/>
+                    </a:solidFill>
+                  </a:tcPr>
+                </a:tc>
+                <a:tc>
+                  <a:txBody>
+                    <a:bodyPr/>
+                    <a:lstStyle/>
+                    <a:p>
+                      <a:pPr algn="ctr"/>
+                      <a:r>
+                        <a:rPr sz="900" b="0">
+                          <a:solidFill>
+                            <a:srgbClr val="1F2937"/>
+                          </a:solidFill>
+                          <a:latin typeface="Meiryo"/>
+                          <a:ea typeface="Meiryo"/>
+                        </a:rPr>
+                        <a:t>2020年</a:t>
                       </a:r>
                     </a:p>
                   </a:txBody>
@@ -10078,7 +9924,7 @@
                           <a:latin typeface="Meiryo"/>
                           <a:ea typeface="Meiryo"/>
                         </a:rPr>
-                        <a:t>25,001 - 30,000</a:t>
+                        <a:t>35,001 - 40,000</a:t>
                       </a:r>
                     </a:p>
                   </a:txBody>
@@ -10102,7 +9948,7 @@
                           <a:latin typeface="Meiryo"/>
                           <a:ea typeface="Meiryo"/>
                         </a:rPr>
-                        <a:t>〒060-0808 北海道札幌市北区北8条西4丁目11-1</a:t>
+                        <a:t>〒060-0005 北海道札幌市中央区北五条西6丁目2-4</a:t>
                       </a:r>
                     </a:p>
                   </a:txBody>
@@ -10152,7 +9998,7 @@
                           <a:latin typeface="Meiryo"/>
                           <a:ea typeface="Meiryo"/>
                         </a:rPr>
-                        <a:t>三井ガーデンホテル札幌ウエスト</a:t>
+                        <a:t>THE KNOT SAPPORO</a:t>
                       </a:r>
                     </a:p>
                   </a:txBody>
@@ -10200,7 +10046,7 @@
                           <a:latin typeface="Meiryo"/>
                           <a:ea typeface="Meiryo"/>
                         </a:rPr>
-                        <a:t>169</a:t>
+                        <a:t>140</a:t>
                       </a:r>
                     </a:p>
                   </a:txBody>
@@ -10248,7 +10094,7 @@
                           <a:latin typeface="Meiryo"/>
                           <a:ea typeface="Meiryo"/>
                         </a:rPr>
-                        <a:t>35,001 - 40,000</a:t>
+                        <a:t>25,001 - 30,000</a:t>
                       </a:r>
                     </a:p>
                   </a:txBody>
@@ -10272,7 +10118,7 @@
                           <a:latin typeface="Meiryo"/>
                           <a:ea typeface="Meiryo"/>
                         </a:rPr>
-                        <a:t>〒060-0005 北海道札幌市中央区北五条西6丁目2-4</a:t>
+                        <a:t>〒060-0063 北海道札幌市中央区南三条西3丁目16-2</a:t>
                       </a:r>
                     </a:p>
                   </a:txBody>
@@ -10322,7 +10168,7 @@
                           <a:latin typeface="Meiryo"/>
                           <a:ea typeface="Meiryo"/>
                         </a:rPr>
-                        <a:t>THE KNOT SAPPORO</a:t>
+                        <a:t>すすきのグランベルホテル</a:t>
                       </a:r>
                     </a:p>
                   </a:txBody>
@@ -10370,31 +10216,31 @@
                           <a:latin typeface="Meiryo"/>
                           <a:ea typeface="Meiryo"/>
                         </a:rPr>
-                        <a:t>140</a:t>
-                      </a:r>
-                    </a:p>
-                  </a:txBody>
-                  <a:tcPr anchor="ctr">
-                    <a:solidFill>
-                      <a:srgbClr val="FFFFFF"/>
-                    </a:solidFill>
-                  </a:tcPr>
-                </a:tc>
-                <a:tc>
-                  <a:txBody>
-                    <a:bodyPr/>
-                    <a:lstStyle/>
-                    <a:p>
-                      <a:pPr algn="ctr"/>
-                      <a:r>
-                        <a:rPr sz="900" b="0">
-                          <a:solidFill>
-                            <a:srgbClr val="1F2937"/>
-                          </a:solidFill>
-                          <a:latin typeface="Meiryo"/>
-                          <a:ea typeface="Meiryo"/>
-                        </a:rPr>
-                        <a:t>2020年</a:t>
+                        <a:t>300</a:t>
+                      </a:r>
+                    </a:p>
+                  </a:txBody>
+                  <a:tcPr anchor="ctr">
+                    <a:solidFill>
+                      <a:srgbClr val="FFFFFF"/>
+                    </a:solidFill>
+                  </a:tcPr>
+                </a:tc>
+                <a:tc>
+                  <a:txBody>
+                    <a:bodyPr/>
+                    <a:lstStyle/>
+                    <a:p>
+                      <a:pPr algn="ctr"/>
+                      <a:r>
+                        <a:rPr sz="900" b="0">
+                          <a:solidFill>
+                            <a:srgbClr val="1F2937"/>
+                          </a:solidFill>
+                          <a:latin typeface="Meiryo"/>
+                          <a:ea typeface="Meiryo"/>
+                        </a:rPr>
+                        <a:t>2021年</a:t>
                       </a:r>
                     </a:p>
                   </a:txBody>
@@ -10418,7 +10264,7 @@
                           <a:latin typeface="Meiryo"/>
                           <a:ea typeface="Meiryo"/>
                         </a:rPr>
-                        <a:t>25,001 - 30,000</a:t>
+                        <a:t>20,001 - 25,000</a:t>
                       </a:r>
                     </a:p>
                   </a:txBody>
@@ -10442,7 +10288,7 @@
                           <a:latin typeface="Meiryo"/>
                           <a:ea typeface="Meiryo"/>
                         </a:rPr>
-                        <a:t>〒060-0063 北海道札幌市中央区南三条西3丁目16-2</a:t>
+                        <a:t>〒064-0805 北海道札幌市中央区南5条西2丁目6-2</a:t>
                       </a:r>
                     </a:p>
                   </a:txBody>
@@ -10492,7 +10338,7 @@
                           <a:latin typeface="Meiryo"/>
                           <a:ea typeface="Meiryo"/>
                         </a:rPr>
-                        <a:t>すすきのグランベルホテル</a:t>
+                        <a:t>ザ ロイヤルパーク キャンバス 札幌大通公園</a:t>
                       </a:r>
                     </a:p>
                   </a:txBody>
@@ -10540,7 +10386,7 @@
                           <a:latin typeface="Meiryo"/>
                           <a:ea typeface="Meiryo"/>
                         </a:rPr>
-                        <a:t>300</a:t>
+                        <a:t>134</a:t>
                       </a:r>
                     </a:p>
                   </a:txBody>
@@ -10612,7 +10458,7 @@
                           <a:latin typeface="Meiryo"/>
                           <a:ea typeface="Meiryo"/>
                         </a:rPr>
-                        <a:t>〒064-0805 北海道札幌市中央区南5条西2丁目6-2</a:t>
+                        <a:t>〒060-0042 北海道札幌市中央区大通西1丁目12-2,13-1</a:t>
                       </a:r>
                     </a:p>
                   </a:txBody>
@@ -10662,7 +10508,7 @@
                           <a:latin typeface="Meiryo"/>
                           <a:ea typeface="Meiryo"/>
                         </a:rPr>
-                        <a:t>ザ ロイヤルパーク キャンバス 札幌大通公園</a:t>
+                        <a:t>OMO3札幌すすきの</a:t>
                       </a:r>
                     </a:p>
                   </a:txBody>
@@ -10710,31 +10556,31 @@
                           <a:latin typeface="Meiryo"/>
                           <a:ea typeface="Meiryo"/>
                         </a:rPr>
-                        <a:t>134</a:t>
-                      </a:r>
-                    </a:p>
-                  </a:txBody>
-                  <a:tcPr anchor="ctr">
-                    <a:solidFill>
-                      <a:srgbClr val="FFFFFF"/>
-                    </a:solidFill>
-                  </a:tcPr>
-                </a:tc>
-                <a:tc>
-                  <a:txBody>
-                    <a:bodyPr/>
-                    <a:lstStyle/>
-                    <a:p>
-                      <a:pPr algn="ctr"/>
-                      <a:r>
-                        <a:rPr sz="900" b="0">
-                          <a:solidFill>
-                            <a:srgbClr val="1F2937"/>
-                          </a:solidFill>
-                          <a:latin typeface="Meiryo"/>
-                          <a:ea typeface="Meiryo"/>
-                        </a:rPr>
-                        <a:t>2021年</a:t>
+                        <a:t>226</a:t>
+                      </a:r>
+                    </a:p>
+                  </a:txBody>
+                  <a:tcPr anchor="ctr">
+                    <a:solidFill>
+                      <a:srgbClr val="FFFFFF"/>
+                    </a:solidFill>
+                  </a:tcPr>
+                </a:tc>
+                <a:tc>
+                  <a:txBody>
+                    <a:bodyPr/>
+                    <a:lstStyle/>
+                    <a:p>
+                      <a:pPr algn="ctr"/>
+                      <a:r>
+                        <a:rPr sz="900" b="0">
+                          <a:solidFill>
+                            <a:srgbClr val="1F2937"/>
+                          </a:solidFill>
+                          <a:latin typeface="Meiryo"/>
+                          <a:ea typeface="Meiryo"/>
+                        </a:rPr>
+                        <a:t>2022年</a:t>
                       </a:r>
                     </a:p>
                   </a:txBody>
@@ -10758,7 +10604,7 @@
                           <a:latin typeface="Meiryo"/>
                           <a:ea typeface="Meiryo"/>
                         </a:rPr>
-                        <a:t>20,001 - 25,000</a:t>
+                        <a:t>10,001 - 12,500</a:t>
                       </a:r>
                     </a:p>
                   </a:txBody>
@@ -10782,7 +10628,7 @@
                           <a:latin typeface="Meiryo"/>
                           <a:ea typeface="Meiryo"/>
                         </a:rPr>
-                        <a:t>〒060-0042 北海道札幌市中央区大通西1丁目12-2,13-1</a:t>
+                        <a:t>〒064-0805 北海道札幌市中央区南5条西6丁目14-1</a:t>
                       </a:r>
                     </a:p>
                   </a:txBody>
@@ -10832,79 +10678,79 @@
                           <a:latin typeface="Meiryo"/>
                           <a:ea typeface="Meiryo"/>
                         </a:rPr>
-                        <a:t>OMO3札幌すすきの</a:t>
-                      </a:r>
-                    </a:p>
-                  </a:txBody>
-                  <a:tcPr anchor="ctr">
-                    <a:solidFill>
-                      <a:srgbClr val="F3F4F6"/>
-                    </a:solidFill>
-                  </a:tcPr>
-                </a:tc>
-                <a:tc>
-                  <a:txBody>
-                    <a:bodyPr/>
-                    <a:lstStyle/>
-                    <a:p>
-                      <a:pPr algn="ctr"/>
-                      <a:r>
-                        <a:rPr sz="900" b="0">
-                          <a:solidFill>
-                            <a:srgbClr val="1F2937"/>
-                          </a:solidFill>
-                          <a:latin typeface="Meiryo"/>
-                          <a:ea typeface="Meiryo"/>
-                        </a:rPr>
-                        <a:t>ビジネスホテル</a:t>
-                      </a:r>
-                    </a:p>
-                  </a:txBody>
-                  <a:tcPr anchor="ctr">
-                    <a:solidFill>
-                      <a:srgbClr val="F3F4F6"/>
-                    </a:solidFill>
-                  </a:tcPr>
-                </a:tc>
-                <a:tc>
-                  <a:txBody>
-                    <a:bodyPr/>
-                    <a:lstStyle/>
-                    <a:p>
-                      <a:pPr algn="ctr"/>
-                      <a:r>
-                        <a:rPr sz="900" b="0">
-                          <a:solidFill>
-                            <a:srgbClr val="1F2937"/>
-                          </a:solidFill>
-                          <a:latin typeface="Meiryo"/>
-                          <a:ea typeface="Meiryo"/>
-                        </a:rPr>
-                        <a:t>226</a:t>
-                      </a:r>
-                    </a:p>
-                  </a:txBody>
-                  <a:tcPr anchor="ctr">
-                    <a:solidFill>
-                      <a:srgbClr val="F3F4F6"/>
-                    </a:solidFill>
-                  </a:tcPr>
-                </a:tc>
-                <a:tc>
-                  <a:txBody>
-                    <a:bodyPr/>
-                    <a:lstStyle/>
-                    <a:p>
-                      <a:pPr algn="ctr"/>
-                      <a:r>
-                        <a:rPr sz="900" b="0">
-                          <a:solidFill>
-                            <a:srgbClr val="1F2937"/>
-                          </a:solidFill>
-                          <a:latin typeface="Meiryo"/>
-                          <a:ea typeface="Meiryo"/>
-                        </a:rPr>
-                        <a:t>2022年</a:t>
+                        <a:t>ホテルエミオン札幌</a:t>
+                      </a:r>
+                    </a:p>
+                  </a:txBody>
+                  <a:tcPr anchor="ctr">
+                    <a:solidFill>
+                      <a:srgbClr val="F3F4F6"/>
+                    </a:solidFill>
+                  </a:tcPr>
+                </a:tc>
+                <a:tc>
+                  <a:txBody>
+                    <a:bodyPr/>
+                    <a:lstStyle/>
+                    <a:p>
+                      <a:pPr algn="ctr"/>
+                      <a:r>
+                        <a:rPr sz="900" b="0">
+                          <a:solidFill>
+                            <a:srgbClr val="1F2937"/>
+                          </a:solidFill>
+                          <a:latin typeface="Meiryo"/>
+                          <a:ea typeface="Meiryo"/>
+                        </a:rPr>
+                        <a:t>シティホテル</a:t>
+                      </a:r>
+                    </a:p>
+                  </a:txBody>
+                  <a:tcPr anchor="ctr">
+                    <a:solidFill>
+                      <a:srgbClr val="F3F4F6"/>
+                    </a:solidFill>
+                  </a:tcPr>
+                </a:tc>
+                <a:tc>
+                  <a:txBody>
+                    <a:bodyPr/>
+                    <a:lstStyle/>
+                    <a:p>
+                      <a:pPr algn="ctr"/>
+                      <a:r>
+                        <a:rPr sz="900" b="0">
+                          <a:solidFill>
+                            <a:srgbClr val="1F2937"/>
+                          </a:solidFill>
+                          <a:latin typeface="Meiryo"/>
+                          <a:ea typeface="Meiryo"/>
+                        </a:rPr>
+                        <a:t>295</a:t>
+                      </a:r>
+                    </a:p>
+                  </a:txBody>
+                  <a:tcPr anchor="ctr">
+                    <a:solidFill>
+                      <a:srgbClr val="F3F4F6"/>
+                    </a:solidFill>
+                  </a:tcPr>
+                </a:tc>
+                <a:tc>
+                  <a:txBody>
+                    <a:bodyPr/>
+                    <a:lstStyle/>
+                    <a:p>
+                      <a:pPr algn="ctr"/>
+                      <a:r>
+                        <a:rPr sz="900" b="0">
+                          <a:solidFill>
+                            <a:srgbClr val="1F2937"/>
+                          </a:solidFill>
+                          <a:latin typeface="Meiryo"/>
+                          <a:ea typeface="Meiryo"/>
+                        </a:rPr>
+                        <a:t>2023年</a:t>
                       </a:r>
                     </a:p>
                   </a:txBody>
@@ -10928,7 +10774,7 @@
                           <a:latin typeface="Meiryo"/>
                           <a:ea typeface="Meiryo"/>
                         </a:rPr>
-                        <a:t>10,001 - 12,500</a:t>
+                        <a:t>15,001 - 20,000</a:t>
                       </a:r>
                     </a:p>
                   </a:txBody>
@@ -10952,7 +10798,7 @@
                           <a:latin typeface="Meiryo"/>
                           <a:ea typeface="Meiryo"/>
                         </a:rPr>
-                        <a:t>〒064-0805 北海道札幌市中央区南5条西6丁目14-1</a:t>
+                        <a:t>〒060-0808 北海道札幌市北区北8条西1-4</a:t>
                       </a:r>
                     </a:p>
                   </a:txBody>
@@ -11002,7 +10848,7 @@
                           <a:latin typeface="Meiryo"/>
                           <a:ea typeface="Meiryo"/>
                         </a:rPr>
-                        <a:t>ホテルエミオン札幌</a:t>
+                        <a:t>SAPPORO STREAM HOTEL</a:t>
                       </a:r>
                     </a:p>
                   </a:txBody>
@@ -11050,31 +10896,31 @@
                           <a:latin typeface="Meiryo"/>
                           <a:ea typeface="Meiryo"/>
                         </a:rPr>
-                        <a:t>295</a:t>
-                      </a:r>
-                    </a:p>
-                  </a:txBody>
-                  <a:tcPr anchor="ctr">
-                    <a:solidFill>
-                      <a:srgbClr val="FFFFFF"/>
-                    </a:solidFill>
-                  </a:tcPr>
-                </a:tc>
-                <a:tc>
-                  <a:txBody>
-                    <a:bodyPr/>
-                    <a:lstStyle/>
-                    <a:p>
-                      <a:pPr algn="ctr"/>
-                      <a:r>
-                        <a:rPr sz="900" b="0">
-                          <a:solidFill>
-                            <a:srgbClr val="1F2937"/>
-                          </a:solidFill>
-                          <a:latin typeface="Meiryo"/>
-                          <a:ea typeface="Meiryo"/>
-                        </a:rPr>
-                        <a:t>2023年</a:t>
+                        <a:t>436</a:t>
+                      </a:r>
+                    </a:p>
+                  </a:txBody>
+                  <a:tcPr anchor="ctr">
+                    <a:solidFill>
+                      <a:srgbClr val="FFFFFF"/>
+                    </a:solidFill>
+                  </a:tcPr>
+                </a:tc>
+                <a:tc>
+                  <a:txBody>
+                    <a:bodyPr/>
+                    <a:lstStyle/>
+                    <a:p>
+                      <a:pPr algn="ctr"/>
+                      <a:r>
+                        <a:rPr sz="900" b="0">
+                          <a:solidFill>
+                            <a:srgbClr val="1F2937"/>
+                          </a:solidFill>
+                          <a:latin typeface="Meiryo"/>
+                          <a:ea typeface="Meiryo"/>
+                        </a:rPr>
+                        <a:t>2024年</a:t>
                       </a:r>
                     </a:p>
                   </a:txBody>
@@ -11098,7 +10944,7 @@
                           <a:latin typeface="Meiryo"/>
                           <a:ea typeface="Meiryo"/>
                         </a:rPr>
-                        <a:t>15,001 - 20,000</a:t>
+                        <a:t>40,001 - 45,000</a:t>
                       </a:r>
                     </a:p>
                   </a:txBody>
@@ -11122,7 +10968,7 @@
                           <a:latin typeface="Meiryo"/>
                           <a:ea typeface="Meiryo"/>
                         </a:rPr>
-                        <a:t>〒060-0808 北海道札幌市北区北8条西1-4</a:t>
+                        <a:t>〒064-0804 北海道札幌市中央区南4条西4丁目1-1</a:t>
                       </a:r>
                     </a:p>
                   </a:txBody>
@@ -11172,7 +11018,7 @@
                           <a:latin typeface="Meiryo"/>
                           <a:ea typeface="Meiryo"/>
                         </a:rPr>
-                        <a:t>SAPPORO STREAM HOTEL</a:t>
+                        <a:t>コートヤード・バイ・マリオット札幌</a:t>
                       </a:r>
                     </a:p>
                   </a:txBody>
@@ -11220,7 +11066,7 @@
                           <a:latin typeface="Meiryo"/>
                           <a:ea typeface="Meiryo"/>
                         </a:rPr>
-                        <a:t>436</a:t>
+                        <a:t>321</a:t>
                       </a:r>
                     </a:p>
                   </a:txBody>
@@ -11268,7 +11114,7 @@
                           <a:latin typeface="Meiryo"/>
                           <a:ea typeface="Meiryo"/>
                         </a:rPr>
-                        <a:t>40,001 - 45,000</a:t>
+                        <a:t>30,001 - 35,000</a:t>
                       </a:r>
                     </a:p>
                   </a:txBody>
@@ -11292,7 +11138,7 @@
                           <a:latin typeface="Meiryo"/>
                           <a:ea typeface="Meiryo"/>
                         </a:rPr>
-                        <a:t>〒064-0804 北海道札幌市中央区南4条西4丁目1-1</a:t>
+                        <a:t>〒064-0810 北海道札幌市中央区南10条西1丁目1</a:t>
                       </a:r>
                     </a:p>
                   </a:txBody>
@@ -11342,79 +11188,79 @@
                           <a:latin typeface="Meiryo"/>
                           <a:ea typeface="Meiryo"/>
                         </a:rPr>
-                        <a:t>コートヤード・バイ・マリオット札幌</a:t>
-                      </a:r>
-                    </a:p>
-                  </a:txBody>
-                  <a:tcPr anchor="ctr">
-                    <a:solidFill>
-                      <a:srgbClr val="FFFFFF"/>
-                    </a:solidFill>
-                  </a:tcPr>
-                </a:tc>
-                <a:tc>
-                  <a:txBody>
-                    <a:bodyPr/>
-                    <a:lstStyle/>
-                    <a:p>
-                      <a:pPr algn="ctr"/>
-                      <a:r>
-                        <a:rPr sz="900" b="0">
-                          <a:solidFill>
-                            <a:srgbClr val="1F2937"/>
-                          </a:solidFill>
-                          <a:latin typeface="Meiryo"/>
-                          <a:ea typeface="Meiryo"/>
-                        </a:rPr>
-                        <a:t>シティホテル</a:t>
-                      </a:r>
-                    </a:p>
-                  </a:txBody>
-                  <a:tcPr anchor="ctr">
-                    <a:solidFill>
-                      <a:srgbClr val="FFFFFF"/>
-                    </a:solidFill>
-                  </a:tcPr>
-                </a:tc>
-                <a:tc>
-                  <a:txBody>
-                    <a:bodyPr/>
-                    <a:lstStyle/>
-                    <a:p>
-                      <a:pPr algn="ctr"/>
-                      <a:r>
-                        <a:rPr sz="900" b="0">
-                          <a:solidFill>
-                            <a:srgbClr val="1F2937"/>
-                          </a:solidFill>
-                          <a:latin typeface="Meiryo"/>
-                          <a:ea typeface="Meiryo"/>
-                        </a:rPr>
-                        <a:t>321</a:t>
-                      </a:r>
-                    </a:p>
-                  </a:txBody>
-                  <a:tcPr anchor="ctr">
-                    <a:solidFill>
-                      <a:srgbClr val="FFFFFF"/>
-                    </a:solidFill>
-                  </a:tcPr>
-                </a:tc>
-                <a:tc>
-                  <a:txBody>
-                    <a:bodyPr/>
-                    <a:lstStyle/>
-                    <a:p>
-                      <a:pPr algn="ctr"/>
-                      <a:r>
-                        <a:rPr sz="900" b="0">
-                          <a:solidFill>
-                            <a:srgbClr val="1F2937"/>
-                          </a:solidFill>
-                          <a:latin typeface="Meiryo"/>
-                          <a:ea typeface="Meiryo"/>
-                        </a:rPr>
-                        <a:t>2024年</a:t>
+                        <a:t>FAV LUX 札幌すすきの</a:t>
+                      </a:r>
+                    </a:p>
+                  </a:txBody>
+                  <a:tcPr anchor="ctr">
+                    <a:solidFill>
+                      <a:srgbClr val="FFFFFF"/>
+                    </a:solidFill>
+                  </a:tcPr>
+                </a:tc>
+                <a:tc>
+                  <a:txBody>
+                    <a:bodyPr/>
+                    <a:lstStyle/>
+                    <a:p>
+                      <a:pPr algn="ctr"/>
+                      <a:r>
+                        <a:rPr sz="900" b="0">
+                          <a:solidFill>
+                            <a:srgbClr val="1F2937"/>
+                          </a:solidFill>
+                          <a:latin typeface="Meiryo"/>
+                          <a:ea typeface="Meiryo"/>
+                        </a:rPr>
+                        <a:t>ビジネスホテル</a:t>
+                      </a:r>
+                    </a:p>
+                  </a:txBody>
+                  <a:tcPr anchor="ctr">
+                    <a:solidFill>
+                      <a:srgbClr val="FFFFFF"/>
+                    </a:solidFill>
+                  </a:tcPr>
+                </a:tc>
+                <a:tc>
+                  <a:txBody>
+                    <a:bodyPr/>
+                    <a:lstStyle/>
+                    <a:p>
+                      <a:pPr algn="ctr"/>
+                      <a:r>
+                        <a:rPr sz="900" b="0">
+                          <a:solidFill>
+                            <a:srgbClr val="1F2937"/>
+                          </a:solidFill>
+                          <a:latin typeface="Meiryo"/>
+                          <a:ea typeface="Meiryo"/>
+                        </a:rPr>
+                        <a:t>84</a:t>
+                      </a:r>
+                    </a:p>
+                  </a:txBody>
+                  <a:tcPr anchor="ctr">
+                    <a:solidFill>
+                      <a:srgbClr val="FFFFFF"/>
+                    </a:solidFill>
+                  </a:tcPr>
+                </a:tc>
+                <a:tc>
+                  <a:txBody>
+                    <a:bodyPr/>
+                    <a:lstStyle/>
+                    <a:p>
+                      <a:pPr algn="ctr"/>
+                      <a:r>
+                        <a:rPr sz="900" b="0">
+                          <a:solidFill>
+                            <a:srgbClr val="1F2937"/>
+                          </a:solidFill>
+                          <a:latin typeface="Meiryo"/>
+                          <a:ea typeface="Meiryo"/>
+                        </a:rPr>
+                        <a:t>2025年</a:t>
                       </a:r>
                     </a:p>
                   </a:txBody>
@@ -11438,7 +11284,7 @@
                           <a:latin typeface="Meiryo"/>
                           <a:ea typeface="Meiryo"/>
                         </a:rPr>
-                        <a:t>30,001 - 35,000</a:t>
+                        <a:t>35,001 - 40,000</a:t>
                       </a:r>
                     </a:p>
                   </a:txBody>
@@ -11462,7 +11308,7 @@
                           <a:latin typeface="Meiryo"/>
                           <a:ea typeface="Meiryo"/>
                         </a:rPr>
-                        <a:t>〒064-0810 北海道札幌市中央区南10条西1丁目1</a:t>
+                        <a:t>〒064-0806 北海道札幌市中央区南6条西7丁目4-3 第82松井ビル</a:t>
                       </a:r>
                     </a:p>
                   </a:txBody>
@@ -11512,55 +11358,55 @@
                           <a:latin typeface="Meiryo"/>
                           <a:ea typeface="Meiryo"/>
                         </a:rPr>
-                        <a:t>FAV LUX 札幌すすきの</a:t>
-                      </a:r>
-                    </a:p>
-                  </a:txBody>
-                  <a:tcPr anchor="ctr">
-                    <a:solidFill>
-                      <a:srgbClr val="F3F4F6"/>
-                    </a:solidFill>
-                  </a:tcPr>
-                </a:tc>
-                <a:tc>
-                  <a:txBody>
-                    <a:bodyPr/>
-                    <a:lstStyle/>
-                    <a:p>
-                      <a:pPr algn="ctr"/>
-                      <a:r>
-                        <a:rPr sz="900" b="0">
-                          <a:solidFill>
-                            <a:srgbClr val="1F2937"/>
-                          </a:solidFill>
-                          <a:latin typeface="Meiryo"/>
-                          <a:ea typeface="Meiryo"/>
-                        </a:rPr>
-                        <a:t>ビジネスホテル</a:t>
-                      </a:r>
-                    </a:p>
-                  </a:txBody>
-                  <a:tcPr anchor="ctr">
-                    <a:solidFill>
-                      <a:srgbClr val="F3F4F6"/>
-                    </a:solidFill>
-                  </a:tcPr>
-                </a:tc>
-                <a:tc>
-                  <a:txBody>
-                    <a:bodyPr/>
-                    <a:lstStyle/>
-                    <a:p>
-                      <a:pPr algn="ctr"/>
-                      <a:r>
-                        <a:rPr sz="900" b="0">
-                          <a:solidFill>
-                            <a:srgbClr val="1F2937"/>
-                          </a:solidFill>
-                          <a:latin typeface="Meiryo"/>
-                          <a:ea typeface="Meiryo"/>
-                        </a:rPr>
-                        <a:t>84</a:t>
+                        <a:t>ザ・ゲートホテル札幌 by HULIC</a:t>
+                      </a:r>
+                    </a:p>
+                  </a:txBody>
+                  <a:tcPr anchor="ctr">
+                    <a:solidFill>
+                      <a:srgbClr val="F3F4F6"/>
+                    </a:solidFill>
+                  </a:tcPr>
+                </a:tc>
+                <a:tc>
+                  <a:txBody>
+                    <a:bodyPr/>
+                    <a:lstStyle/>
+                    <a:p>
+                      <a:pPr algn="ctr"/>
+                      <a:r>
+                        <a:rPr sz="900" b="0">
+                          <a:solidFill>
+                            <a:srgbClr val="1F2937"/>
+                          </a:solidFill>
+                          <a:latin typeface="Meiryo"/>
+                          <a:ea typeface="Meiryo"/>
+                        </a:rPr>
+                        <a:t>シティホテル</a:t>
+                      </a:r>
+                    </a:p>
+                  </a:txBody>
+                  <a:tcPr anchor="ctr">
+                    <a:solidFill>
+                      <a:srgbClr val="F3F4F6"/>
+                    </a:solidFill>
+                  </a:tcPr>
+                </a:tc>
+                <a:tc>
+                  <a:txBody>
+                    <a:bodyPr/>
+                    <a:lstStyle/>
+                    <a:p>
+                      <a:pPr algn="ctr"/>
+                      <a:r>
+                        <a:rPr sz="900" b="0">
+                          <a:solidFill>
+                            <a:srgbClr val="1F2937"/>
+                          </a:solidFill>
+                          <a:latin typeface="Meiryo"/>
+                          <a:ea typeface="Meiryo"/>
+                        </a:rPr>
+                        <a:t>172</a:t>
                       </a:r>
                     </a:p>
                   </a:txBody>
@@ -11608,7 +11454,7 @@
                           <a:latin typeface="Meiryo"/>
                           <a:ea typeface="Meiryo"/>
                         </a:rPr>
-                        <a:t>35,001 - 40,000</a:t>
+                        <a:t>25,001 - 30,000</a:t>
                       </a:r>
                     </a:p>
                   </a:txBody>
@@ -11632,7 +11478,7 @@
                           <a:latin typeface="Meiryo"/>
                           <a:ea typeface="Meiryo"/>
                         </a:rPr>
-                        <a:t>〒064-0806 北海道札幌市中央区南6条西7丁目4-3 第82松井ビル</a:t>
+                        <a:t>〒060-0003 北海道札幌市中央区北3条西3丁目3</a:t>
                       </a:r>
                     </a:p>
                   </a:txBody>
@@ -11682,79 +11528,79 @@
                           <a:latin typeface="Meiryo"/>
                           <a:ea typeface="Meiryo"/>
                         </a:rPr>
-                        <a:t>ザ・ゲートホテル札幌 by HULIC</a:t>
-                      </a:r>
-                    </a:p>
-                  </a:txBody>
-                  <a:tcPr anchor="ctr">
-                    <a:solidFill>
-                      <a:srgbClr val="FFFFFF"/>
-                    </a:solidFill>
-                  </a:tcPr>
-                </a:tc>
-                <a:tc>
-                  <a:txBody>
-                    <a:bodyPr/>
-                    <a:lstStyle/>
-                    <a:p>
-                      <a:pPr algn="ctr"/>
-                      <a:r>
-                        <a:rPr sz="900" b="0">
-                          <a:solidFill>
-                            <a:srgbClr val="1F2937"/>
-                          </a:solidFill>
-                          <a:latin typeface="Meiryo"/>
-                          <a:ea typeface="Meiryo"/>
-                        </a:rPr>
-                        <a:t>シティホテル</a:t>
-                      </a:r>
-                    </a:p>
-                  </a:txBody>
-                  <a:tcPr anchor="ctr">
-                    <a:solidFill>
-                      <a:srgbClr val="FFFFFF"/>
-                    </a:solidFill>
-                  </a:tcPr>
-                </a:tc>
-                <a:tc>
-                  <a:txBody>
-                    <a:bodyPr/>
-                    <a:lstStyle/>
-                    <a:p>
-                      <a:pPr algn="ctr"/>
-                      <a:r>
-                        <a:rPr sz="900" b="0">
-                          <a:solidFill>
-                            <a:srgbClr val="1F2937"/>
-                          </a:solidFill>
-                          <a:latin typeface="Meiryo"/>
-                          <a:ea typeface="Meiryo"/>
-                        </a:rPr>
-                        <a:t>172</a:t>
-                      </a:r>
-                    </a:p>
-                  </a:txBody>
-                  <a:tcPr anchor="ctr">
-                    <a:solidFill>
-                      <a:srgbClr val="FFFFFF"/>
-                    </a:solidFill>
-                  </a:tcPr>
-                </a:tc>
-                <a:tc>
-                  <a:txBody>
-                    <a:bodyPr/>
-                    <a:lstStyle/>
-                    <a:p>
-                      <a:pPr algn="ctr"/>
-                      <a:r>
-                        <a:rPr sz="900" b="0">
-                          <a:solidFill>
-                            <a:srgbClr val="1F2937"/>
-                          </a:solidFill>
-                          <a:latin typeface="Meiryo"/>
-                          <a:ea typeface="Meiryo"/>
-                        </a:rPr>
-                        <a:t>2025年</a:t>
+                        <a:t>ハイアット セントリック札幌</a:t>
+                      </a:r>
+                    </a:p>
+                  </a:txBody>
+                  <a:tcPr anchor="ctr">
+                    <a:solidFill>
+                      <a:srgbClr val="FFFFFF"/>
+                    </a:solidFill>
+                  </a:tcPr>
+                </a:tc>
+                <a:tc>
+                  <a:txBody>
+                    <a:bodyPr/>
+                    <a:lstStyle/>
+                    <a:p>
+                      <a:pPr algn="ctr"/>
+                      <a:r>
+                        <a:rPr sz="900" b="0">
+                          <a:solidFill>
+                            <a:srgbClr val="1F2937"/>
+                          </a:solidFill>
+                          <a:latin typeface="Meiryo"/>
+                          <a:ea typeface="Meiryo"/>
+                        </a:rPr>
+                        <a:t/>
+                      </a:r>
+                    </a:p>
+                  </a:txBody>
+                  <a:tcPr anchor="ctr">
+                    <a:solidFill>
+                      <a:srgbClr val="FFFFFF"/>
+                    </a:solidFill>
+                  </a:tcPr>
+                </a:tc>
+                <a:tc>
+                  <a:txBody>
+                    <a:bodyPr/>
+                    <a:lstStyle/>
+                    <a:p>
+                      <a:pPr algn="ctr"/>
+                      <a:r>
+                        <a:rPr sz="900" b="0">
+                          <a:solidFill>
+                            <a:srgbClr val="1F2937"/>
+                          </a:solidFill>
+                          <a:latin typeface="Meiryo"/>
+                          <a:ea typeface="Meiryo"/>
+                        </a:rPr>
+                        <a:t>216</a:t>
+                      </a:r>
+                    </a:p>
+                  </a:txBody>
+                  <a:tcPr anchor="ctr">
+                    <a:solidFill>
+                      <a:srgbClr val="FFFFFF"/>
+                    </a:solidFill>
+                  </a:tcPr>
+                </a:tc>
+                <a:tc>
+                  <a:txBody>
+                    <a:bodyPr/>
+                    <a:lstStyle/>
+                    <a:p>
+                      <a:pPr algn="ctr"/>
+                      <a:r>
+                        <a:rPr sz="900" b="0">
+                          <a:solidFill>
+                            <a:srgbClr val="1F2937"/>
+                          </a:solidFill>
+                          <a:latin typeface="Meiryo"/>
+                          <a:ea typeface="Meiryo"/>
+                        </a:rPr>
+                        <a:t>2026年</a:t>
                       </a:r>
                     </a:p>
                   </a:txBody>
@@ -11778,7 +11624,7 @@
                           <a:latin typeface="Meiryo"/>
                           <a:ea typeface="Meiryo"/>
                         </a:rPr>
-                        <a:t>25,001 - 30,000</a:t>
+                        <a:t/>
                       </a:r>
                     </a:p>
                   </a:txBody>
@@ -11802,7 +11648,7 @@
                           <a:latin typeface="Meiryo"/>
                           <a:ea typeface="Meiryo"/>
                         </a:rPr>
-                        <a:t>〒060-0003 北海道札幌市中央区北3条西3丁目3</a:t>
+                        <a:t>北海道札幌市中央区北一条西5丁目1番4</a:t>
                       </a:r>
                     </a:p>
                   </a:txBody>
@@ -11852,7 +11698,7 @@
                           <a:latin typeface="Meiryo"/>
                           <a:ea typeface="Meiryo"/>
                         </a:rPr>
-                        <a:t>ハイアット セントリック札幌</a:t>
+                        <a:t>ハイアットセントリック札幌</a:t>
                       </a:r>
                     </a:p>
                   </a:txBody>
@@ -11972,7 +11818,7 @@
                           <a:latin typeface="Meiryo"/>
                           <a:ea typeface="Meiryo"/>
                         </a:rPr>
-                        <a:t>北海道札幌市中央区北一条西5丁目1番4</a:t>
+                        <a:t>北海道札幌市中央区北一条西 5 丁目 1 番 4</a:t>
                       </a:r>
                     </a:p>
                   </a:txBody>
@@ -12022,7 +11868,7 @@
                           <a:latin typeface="Meiryo"/>
                           <a:ea typeface="Meiryo"/>
                         </a:rPr>
-                        <a:t>ハイアットセントリック札幌</a:t>
+                        <a:t>TRUNK HOTEL SAPPORO</a:t>
                       </a:r>
                     </a:p>
                   </a:txBody>
@@ -12070,31 +11916,31 @@
                           <a:latin typeface="Meiryo"/>
                           <a:ea typeface="Meiryo"/>
                         </a:rPr>
-                        <a:t>216</a:t>
-                      </a:r>
-                    </a:p>
-                  </a:txBody>
-                  <a:tcPr anchor="ctr">
-                    <a:solidFill>
-                      <a:srgbClr val="FFFFFF"/>
-                    </a:solidFill>
-                  </a:tcPr>
-                </a:tc>
-                <a:tc>
-                  <a:txBody>
-                    <a:bodyPr/>
-                    <a:lstStyle/>
-                    <a:p>
-                      <a:pPr algn="ctr"/>
-                      <a:r>
-                        <a:rPr sz="900" b="0">
-                          <a:solidFill>
-                            <a:srgbClr val="1F2937"/>
-                          </a:solidFill>
-                          <a:latin typeface="Meiryo"/>
-                          <a:ea typeface="Meiryo"/>
-                        </a:rPr>
-                        <a:t>2026年</a:t>
+                        <a:t>262</a:t>
+                      </a:r>
+                    </a:p>
+                  </a:txBody>
+                  <a:tcPr anchor="ctr">
+                    <a:solidFill>
+                      <a:srgbClr val="FFFFFF"/>
+                    </a:solidFill>
+                  </a:tcPr>
+                </a:tc>
+                <a:tc>
+                  <a:txBody>
+                    <a:bodyPr/>
+                    <a:lstStyle/>
+                    <a:p>
+                      <a:pPr algn="ctr"/>
+                      <a:r>
+                        <a:rPr sz="900" b="0">
+                          <a:solidFill>
+                            <a:srgbClr val="1F2937"/>
+                          </a:solidFill>
+                          <a:latin typeface="Meiryo"/>
+                          <a:ea typeface="Meiryo"/>
+                        </a:rPr>
+                        <a:t>2027年</a:t>
                       </a:r>
                     </a:p>
                   </a:txBody>
@@ -12142,7 +11988,7 @@
                           <a:latin typeface="Meiryo"/>
                           <a:ea typeface="Meiryo"/>
                         </a:rPr>
-                        <a:t>北海道札幌市中央区北一条西 5 丁目 1 番 4</a:t>
+                        <a:t>北海道札幌市中央区南2条西4丁目11-4</a:t>
                       </a:r>
                     </a:p>
                   </a:txBody>
@@ -12192,7 +12038,7 @@
                           <a:latin typeface="Meiryo"/>
                           <a:ea typeface="Meiryo"/>
                         </a:rPr>
-                        <a:t>TRUNK HOTEL SAPPORO</a:t>
+                        <a:t>パーク ハイアット 札幌</a:t>
                       </a:r>
                     </a:p>
                   </a:txBody>
@@ -12240,31 +12086,31 @@
                           <a:latin typeface="Meiryo"/>
                           <a:ea typeface="Meiryo"/>
                         </a:rPr>
-                        <a:t>262</a:t>
-                      </a:r>
-                    </a:p>
-                  </a:txBody>
-                  <a:tcPr anchor="ctr">
-                    <a:solidFill>
-                      <a:srgbClr val="F3F4F6"/>
-                    </a:solidFill>
-                  </a:tcPr>
-                </a:tc>
-                <a:tc>
-                  <a:txBody>
-                    <a:bodyPr/>
-                    <a:lstStyle/>
-                    <a:p>
-                      <a:pPr algn="ctr"/>
-                      <a:r>
-                        <a:rPr sz="900" b="0">
-                          <a:solidFill>
-                            <a:srgbClr val="1F2937"/>
-                          </a:solidFill>
-                          <a:latin typeface="Meiryo"/>
-                          <a:ea typeface="Meiryo"/>
-                        </a:rPr>
-                        <a:t>2027年</a:t>
+                        <a:t>157</a:t>
+                      </a:r>
+                    </a:p>
+                  </a:txBody>
+                  <a:tcPr anchor="ctr">
+                    <a:solidFill>
+                      <a:srgbClr val="F3F4F6"/>
+                    </a:solidFill>
+                  </a:tcPr>
+                </a:tc>
+                <a:tc>
+                  <a:txBody>
+                    <a:bodyPr/>
+                    <a:lstStyle/>
+                    <a:p>
+                      <a:pPr algn="ctr"/>
+                      <a:r>
+                        <a:rPr sz="900" b="0">
+                          <a:solidFill>
+                            <a:srgbClr val="1F2937"/>
+                          </a:solidFill>
+                          <a:latin typeface="Meiryo"/>
+                          <a:ea typeface="Meiryo"/>
+                        </a:rPr>
+                        <a:t>2029年</a:t>
                       </a:r>
                     </a:p>
                   </a:txBody>
@@ -12312,183 +12158,13 @@
                           <a:latin typeface="Meiryo"/>
                           <a:ea typeface="Meiryo"/>
                         </a:rPr>
-                        <a:t>北海道札幌市中央区南2条西4丁目11-4</a:t>
-                      </a:r>
-                    </a:p>
-                  </a:txBody>
-                  <a:tcPr anchor="ctr">
-                    <a:solidFill>
-                      <a:srgbClr val="F3F4F6"/>
-                    </a:solidFill>
-                  </a:tcPr>
-                </a:tc>
-              </a:tr>
-              <a:tr h="292608">
-                <a:tc>
-                  <a:txBody>
-                    <a:bodyPr/>
-                    <a:lstStyle/>
-                    <a:p>
-                      <a:pPr algn="ctr"/>
-                      <a:r>
-                        <a:rPr sz="900" b="0">
-                          <a:solidFill>
-                            <a:srgbClr val="1F2937"/>
-                          </a:solidFill>
-                          <a:latin typeface="Meiryo"/>
-                          <a:ea typeface="Meiryo"/>
-                        </a:rPr>
-                        <a:t>27</a:t>
-                      </a:r>
-                    </a:p>
-                  </a:txBody>
-                  <a:tcPr anchor="ctr">
-                    <a:solidFill>
-                      <a:srgbClr val="FFFFFF"/>
-                    </a:solidFill>
-                  </a:tcPr>
-                </a:tc>
-                <a:tc>
-                  <a:txBody>
-                    <a:bodyPr/>
-                    <a:lstStyle/>
-                    <a:p>
-                      <a:pPr algn="l"/>
-                      <a:r>
-                        <a:rPr sz="900" b="0">
-                          <a:solidFill>
-                            <a:srgbClr val="1F2937"/>
-                          </a:solidFill>
-                          <a:latin typeface="Meiryo"/>
-                          <a:ea typeface="Meiryo"/>
-                        </a:rPr>
-                        <a:t>パーク ハイアット 札幌</a:t>
-                      </a:r>
-                    </a:p>
-                  </a:txBody>
-                  <a:tcPr anchor="ctr">
-                    <a:solidFill>
-                      <a:srgbClr val="FFFFFF"/>
-                    </a:solidFill>
-                  </a:tcPr>
-                </a:tc>
-                <a:tc>
-                  <a:txBody>
-                    <a:bodyPr/>
-                    <a:lstStyle/>
-                    <a:p>
-                      <a:pPr algn="ctr"/>
-                      <a:r>
-                        <a:rPr sz="900" b="0">
-                          <a:solidFill>
-                            <a:srgbClr val="1F2937"/>
-                          </a:solidFill>
-                          <a:latin typeface="Meiryo"/>
-                          <a:ea typeface="Meiryo"/>
-                        </a:rPr>
-                        <a:t/>
-                      </a:r>
-                    </a:p>
-                  </a:txBody>
-                  <a:tcPr anchor="ctr">
-                    <a:solidFill>
-                      <a:srgbClr val="FFFFFF"/>
-                    </a:solidFill>
-                  </a:tcPr>
-                </a:tc>
-                <a:tc>
-                  <a:txBody>
-                    <a:bodyPr/>
-                    <a:lstStyle/>
-                    <a:p>
-                      <a:pPr algn="ctr"/>
-                      <a:r>
-                        <a:rPr sz="900" b="0">
-                          <a:solidFill>
-                            <a:srgbClr val="1F2937"/>
-                          </a:solidFill>
-                          <a:latin typeface="Meiryo"/>
-                          <a:ea typeface="Meiryo"/>
-                        </a:rPr>
-                        <a:t>157</a:t>
-                      </a:r>
-                    </a:p>
-                  </a:txBody>
-                  <a:tcPr anchor="ctr">
-                    <a:solidFill>
-                      <a:srgbClr val="FFFFFF"/>
-                    </a:solidFill>
-                  </a:tcPr>
-                </a:tc>
-                <a:tc>
-                  <a:txBody>
-                    <a:bodyPr/>
-                    <a:lstStyle/>
-                    <a:p>
-                      <a:pPr algn="ctr"/>
-                      <a:r>
-                        <a:rPr sz="900" b="0">
-                          <a:solidFill>
-                            <a:srgbClr val="1F2937"/>
-                          </a:solidFill>
-                          <a:latin typeface="Meiryo"/>
-                          <a:ea typeface="Meiryo"/>
-                        </a:rPr>
-                        <a:t>2029年</a:t>
-                      </a:r>
-                    </a:p>
-                  </a:txBody>
-                  <a:tcPr anchor="ctr">
-                    <a:solidFill>
-                      <a:srgbClr val="FFFFFF"/>
-                    </a:solidFill>
-                  </a:tcPr>
-                </a:tc>
-                <a:tc>
-                  <a:txBody>
-                    <a:bodyPr/>
-                    <a:lstStyle/>
-                    <a:p>
-                      <a:pPr algn="l"/>
-                      <a:r>
-                        <a:rPr sz="900" b="0">
-                          <a:solidFill>
-                            <a:srgbClr val="1F2937"/>
-                          </a:solidFill>
-                          <a:latin typeface="Meiryo"/>
-                          <a:ea typeface="Meiryo"/>
-                        </a:rPr>
-                        <a:t/>
-                      </a:r>
-                    </a:p>
-                  </a:txBody>
-                  <a:tcPr anchor="ctr">
-                    <a:solidFill>
-                      <a:srgbClr val="FFFFFF"/>
-                    </a:solidFill>
-                  </a:tcPr>
-                </a:tc>
-                <a:tc>
-                  <a:txBody>
-                    <a:bodyPr/>
-                    <a:lstStyle/>
-                    <a:p>
-                      <a:pPr algn="l"/>
-                      <a:r>
-                        <a:rPr sz="900" b="0">
-                          <a:solidFill>
-                            <a:srgbClr val="1F2937"/>
-                          </a:solidFill>
-                          <a:latin typeface="Meiryo"/>
-                          <a:ea typeface="Meiryo"/>
-                        </a:rPr>
                         <a:t>北海道札幌市中央区大通西4丁目1番1</a:t>
                       </a:r>
                     </a:p>
                   </a:txBody>
                   <a:tcPr anchor="ctr">
                     <a:solidFill>
-                      <a:srgbClr val="FFFFFF"/>
+                      <a:srgbClr val="F3F4F6"/>
                     </a:solidFill>
                   </a:tcPr>
                 </a:tc>
